--- a/STAT362_Final_Presentation.pptx
+++ b/STAT362_Final_Presentation.pptx
@@ -5,16 +5,16 @@
     <p:sldMasterId id="2147483648" r:id="rId1"/>
   </p:sldMasterIdLst>
   <p:sldIdLst>
-    <p:sldId id="256" r:id="rId7"/>
-    <p:sldId id="257" r:id="rId8"/>
-    <p:sldId id="258" r:id="rId9"/>
-    <p:sldId id="259" r:id="rId10"/>
-    <p:sldId id="260" r:id="rId11"/>
-    <p:sldId id="261" r:id="rId12"/>
-    <p:sldId id="262" r:id="rId13"/>
-    <p:sldId id="263" r:id="rId14"/>
+    <p:sldId id="256" r:id="rId2"/>
+    <p:sldId id="257" r:id="rId3"/>
+    <p:sldId id="258" r:id="rId4"/>
+    <p:sldId id="259" r:id="rId5"/>
+    <p:sldId id="260" r:id="rId6"/>
+    <p:sldId id="261" r:id="rId7"/>
+    <p:sldId id="262" r:id="rId8"/>
+    <p:sldId id="263" r:id="rId9"/>
   </p:sldIdLst>
-  <p:sldSz cx="12191695" cy="6858000" type="screen4x3"/>
+  <p:sldSz cx="12192000" cy="6858000"/>
   <p:notesSz cx="6858000" cy="9144000"/>
   <p:defaultTextStyle>
     <a:defPPr>
@@ -111,18 +111,39 @@
       </a:defRPr>
     </a:lvl9pPr>
   </p:defaultTextStyle>
+  <p:extLst>
+    <p:ext uri="{EFAFB233-063F-42B5-8137-9DF3F51BA10A}">
+      <p15:sldGuideLst xmlns:p15="http://schemas.microsoft.com/office/powerpoint/2012/main">
+        <p15:guide id="1" orient="horz" pos="2160">
+          <p15:clr>
+            <a:srgbClr val="A4A3A4"/>
+          </p15:clr>
+        </p15:guide>
+        <p15:guide id="2" pos="2880">
+          <p15:clr>
+            <a:srgbClr val="A4A3A4"/>
+          </p15:clr>
+        </p15:guide>
+      </p15:sldGuideLst>
+    </p:ext>
+  </p:extLst>
 </p:presentation>
 </file>
 
 <file path=ppt/charts/chart1.xml><?xml version="1.0" encoding="utf-8"?>
-<c:chartSpace xmlns:c="http://schemas.openxmlformats.org/drawingml/2006/chart" xmlns:a="http://schemas.openxmlformats.org/drawingml/2006/main" xmlns:r="http://schemas.openxmlformats.org/officeDocument/2006/relationships">
+<c:chartSpace xmlns:c="http://schemas.openxmlformats.org/drawingml/2006/chart" xmlns:a="http://schemas.openxmlformats.org/drawingml/2006/main" xmlns:r="http://schemas.openxmlformats.org/officeDocument/2006/relationships" xmlns:c16r2="http://schemas.microsoft.com/office/drawing/2015/06/chart">
   <c:date1904 val="0"/>
+  <c:lang val="en-US"/>
+  <c:roundedCorners val="1"/>
+  <c:style val="2"/>
   <c:chart>
     <c:autoTitleDeleted val="1"/>
     <c:plotArea>
+      <c:layout/>
       <c:barChart>
         <c:barDir val="bar"/>
         <c:grouping val="clustered"/>
+        <c:varyColors val="1"/>
         <c:ser>
           <c:idx val="0"/>
           <c:order val="0"/>
@@ -137,110 +158,240 @@
               </c:strCache>
             </c:strRef>
           </c:tx>
+          <c:invertIfNegative val="1"/>
           <c:dPt>
             <c:idx val="0"/>
+            <c:invertIfNegative val="1"/>
+            <c:bubble3D val="0"/>
             <c:spPr>
               <a:solidFill>
                 <a:srgbClr val="D1D5DB"/>
               </a:solidFill>
             </c:spPr>
+            <c:extLst>
+              <c:ext xmlns:c16="http://schemas.microsoft.com/office/drawing/2014/chart" uri="{C3380CC4-5D6E-409C-BE32-E72D297353CC}">
+                <c16:uniqueId val="{00000001-B9D6-45D4-B06B-BA28D3195DAC}"/>
+              </c:ext>
+            </c:extLst>
           </c:dPt>
           <c:dPt>
             <c:idx val="1"/>
+            <c:invertIfNegative val="1"/>
+            <c:bubble3D val="0"/>
             <c:spPr>
               <a:solidFill>
                 <a:srgbClr val="9CA3AF"/>
               </a:solidFill>
             </c:spPr>
+            <c:extLst>
+              <c:ext xmlns:c16="http://schemas.microsoft.com/office/drawing/2014/chart" uri="{C3380CC4-5D6E-409C-BE32-E72D297353CC}">
+                <c16:uniqueId val="{00000003-B9D6-45D4-B06B-BA28D3195DAC}"/>
+              </c:ext>
+            </c:extLst>
           </c:dPt>
           <c:dPt>
             <c:idx val="2"/>
+            <c:invertIfNegative val="1"/>
+            <c:bubble3D val="0"/>
             <c:spPr>
               <a:solidFill>
                 <a:srgbClr val="9CA3AF"/>
               </a:solidFill>
             </c:spPr>
+            <c:extLst>
+              <c:ext xmlns:c16="http://schemas.microsoft.com/office/drawing/2014/chart" uri="{C3380CC4-5D6E-409C-BE32-E72D297353CC}">
+                <c16:uniqueId val="{00000005-B9D6-45D4-B06B-BA28D3195DAC}"/>
+              </c:ext>
+            </c:extLst>
           </c:dPt>
           <c:dPt>
             <c:idx val="3"/>
+            <c:invertIfNegative val="1"/>
+            <c:bubble3D val="0"/>
             <c:spPr>
               <a:solidFill>
                 <a:srgbClr val="2563EB"/>
               </a:solidFill>
             </c:spPr>
+            <c:extLst>
+              <c:ext xmlns:c16="http://schemas.microsoft.com/office/drawing/2014/chart" uri="{C3380CC4-5D6E-409C-BE32-E72D297353CC}">
+                <c16:uniqueId val="{00000007-B9D6-45D4-B06B-BA28D3195DAC}"/>
+              </c:ext>
+            </c:extLst>
           </c:dPt>
           <c:dPt>
             <c:idx val="4"/>
+            <c:invertIfNegative val="1"/>
+            <c:bubble3D val="0"/>
             <c:spPr>
               <a:solidFill>
                 <a:srgbClr val="9CA3AF"/>
               </a:solidFill>
             </c:spPr>
+            <c:extLst>
+              <c:ext xmlns:c16="http://schemas.microsoft.com/office/drawing/2014/chart" uri="{C3380CC4-5D6E-409C-BE32-E72D297353CC}">
+                <c16:uniqueId val="{00000009-B9D6-45D4-B06B-BA28D3195DAC}"/>
+              </c:ext>
+            </c:extLst>
           </c:dPt>
           <c:dPt>
             <c:idx val="5"/>
+            <c:invertIfNegative val="1"/>
+            <c:bubble3D val="0"/>
             <c:spPr>
               <a:solidFill>
                 <a:srgbClr val="2563EB"/>
               </a:solidFill>
             </c:spPr>
+            <c:extLst>
+              <c:ext xmlns:c16="http://schemas.microsoft.com/office/drawing/2014/chart" uri="{C3380CC4-5D6E-409C-BE32-E72D297353CC}">
+                <c16:uniqueId val="{0000000B-B9D6-45D4-B06B-BA28D3195DAC}"/>
+              </c:ext>
+            </c:extLst>
           </c:dPt>
           <c:dPt>
             <c:idx val="6"/>
+            <c:invertIfNegative val="1"/>
+            <c:bubble3D val="0"/>
             <c:spPr>
               <a:solidFill>
                 <a:srgbClr val="2563EB"/>
               </a:solidFill>
             </c:spPr>
+            <c:extLst>
+              <c:ext xmlns:c16="http://schemas.microsoft.com/office/drawing/2014/chart" uri="{C3380CC4-5D6E-409C-BE32-E72D297353CC}">
+                <c16:uniqueId val="{0000000D-B9D6-45D4-B06B-BA28D3195DAC}"/>
+              </c:ext>
+            </c:extLst>
           </c:dPt>
           <c:dPt>
             <c:idx val="7"/>
+            <c:invertIfNegative val="1"/>
+            <c:bubble3D val="0"/>
             <c:spPr>
               <a:solidFill>
                 <a:srgbClr val="60A5FA"/>
               </a:solidFill>
             </c:spPr>
+            <c:extLst>
+              <c:ext xmlns:c16="http://schemas.microsoft.com/office/drawing/2014/chart" uri="{C3380CC4-5D6E-409C-BE32-E72D297353CC}">
+                <c16:uniqueId val="{0000000F-B9D6-45D4-B06B-BA28D3195DAC}"/>
+              </c:ext>
+            </c:extLst>
           </c:dPt>
           <c:dPt>
             <c:idx val="8"/>
+            <c:invertIfNegative val="1"/>
+            <c:bubble3D val="0"/>
             <c:spPr>
               <a:solidFill>
                 <a:srgbClr val="2563EB"/>
               </a:solidFill>
             </c:spPr>
+            <c:extLst>
+              <c:ext xmlns:c16="http://schemas.microsoft.com/office/drawing/2014/chart" uri="{C3380CC4-5D6E-409C-BE32-E72D297353CC}">
+                <c16:uniqueId val="{00000011-B9D6-45D4-B06B-BA28D3195DAC}"/>
+              </c:ext>
+            </c:extLst>
           </c:dPt>
           <c:dPt>
             <c:idx val="9"/>
+            <c:invertIfNegative val="1"/>
+            <c:bubble3D val="0"/>
             <c:spPr>
               <a:solidFill>
                 <a:srgbClr val="60A5FA"/>
               </a:solidFill>
             </c:spPr>
+            <c:extLst>
+              <c:ext xmlns:c16="http://schemas.microsoft.com/office/drawing/2014/chart" uri="{C3380CC4-5D6E-409C-BE32-E72D297353CC}">
+                <c16:uniqueId val="{00000013-B9D6-45D4-B06B-BA28D3195DAC}"/>
+              </c:ext>
+            </c:extLst>
           </c:dPt>
           <c:dPt>
             <c:idx val="10"/>
+            <c:invertIfNegative val="1"/>
+            <c:bubble3D val="0"/>
             <c:spPr>
               <a:solidFill>
                 <a:srgbClr val="2563EB"/>
               </a:solidFill>
             </c:spPr>
+            <c:extLst>
+              <c:ext xmlns:c16="http://schemas.microsoft.com/office/drawing/2014/chart" uri="{C3380CC4-5D6E-409C-BE32-E72D297353CC}">
+                <c16:uniqueId val="{00000015-B9D6-45D4-B06B-BA28D3195DAC}"/>
+              </c:ext>
+            </c:extLst>
           </c:dPt>
           <c:dPt>
             <c:idx val="11"/>
+            <c:invertIfNegative val="1"/>
+            <c:bubble3D val="0"/>
             <c:spPr>
               <a:solidFill>
                 <a:srgbClr val="60A5FA"/>
               </a:solidFill>
             </c:spPr>
+            <c:extLst>
+              <c:ext xmlns:c16="http://schemas.microsoft.com/office/drawing/2014/chart" uri="{C3380CC4-5D6E-409C-BE32-E72D297353CC}">
+                <c16:uniqueId val="{00000017-B9D6-45D4-B06B-BA28D3195DAC}"/>
+              </c:ext>
+            </c:extLst>
           </c:dPt>
           <c:dPt>
             <c:idx val="12"/>
+            <c:invertIfNegative val="1"/>
+            <c:bubble3D val="0"/>
             <c:spPr>
               <a:solidFill>
                 <a:srgbClr val="2563EB"/>
               </a:solidFill>
             </c:spPr>
+            <c:extLst>
+              <c:ext xmlns:c16="http://schemas.microsoft.com/office/drawing/2014/chart" uri="{C3380CC4-5D6E-409C-BE32-E72D297353CC}">
+                <c16:uniqueId val="{00000019-B9D6-45D4-B06B-BA28D3195DAC}"/>
+              </c:ext>
+            </c:extLst>
           </c:dPt>
+          <c:dLbls>
+            <c:numFmt formatCode="0.0%" sourceLinked="0"/>
+            <c:spPr>
+              <a:noFill/>
+              <a:ln>
+                <a:noFill/>
+              </a:ln>
+              <a:effectLst/>
+            </c:spPr>
+            <c:txPr>
+              <a:bodyPr/>
+              <a:lstStyle/>
+              <a:p>
+                <a:pPr>
+                  <a:defRPr sz="1000">
+                    <a:solidFill>
+                      <a:srgbClr val="1F2937"/>
+                    </a:solidFill>
+                    <a:latin typeface="Calibri"/>
+                  </a:defRPr>
+                </a:pPr>
+                <a:endParaRPr lang="en-US"/>
+              </a:p>
+            </c:txPr>
+            <c:dLblPos val="outEnd"/>
+            <c:showLegendKey val="0"/>
+            <c:showVal val="1"/>
+            <c:showCatName val="0"/>
+            <c:showSerName val="0"/>
+            <c:showPercent val="0"/>
+            <c:showBubbleSize val="0"/>
+            <c:showLeaderLines val="0"/>
+            <c:extLst>
+              <c:ext xmlns:c15="http://schemas.microsoft.com/office/drawing/2012/chart" uri="{CE6537A1-D6FC-4f65-9D91-7224C49458BB}">
+                <c15:showLeaderLines val="0"/>
+              </c:ext>
+            </c:extLst>
+          </c:dLbls>
           <c:cat>
             <c:strRef>
               <c:f>Sheet1!$A$2:$A$14</c:f>
@@ -295,64 +446,54 @@
                 <c:formatCode>General</c:formatCode>
                 <c:ptCount val="13"/>
                 <c:pt idx="0">
-                  <c:v>0.363</c:v>
+                  <c:v>0.36299999999999999</c:v>
                 </c:pt>
                 <c:pt idx="1">
-                  <c:v>0.363</c:v>
+                  <c:v>0.36299999999999999</c:v>
                 </c:pt>
                 <c:pt idx="2">
-                  <c:v>0.369</c:v>
+                  <c:v>0.36899999999999999</c:v>
                 </c:pt>
                 <c:pt idx="3">
-                  <c:v>0.383</c:v>
+                  <c:v>0.38300000000000001</c:v>
                 </c:pt>
                 <c:pt idx="4">
-                  <c:v>0.419</c:v>
+                  <c:v>0.41899999999999998</c:v>
                 </c:pt>
                 <c:pt idx="5">
-                  <c:v>0.664</c:v>
+                  <c:v>0.66400000000000003</c:v>
                 </c:pt>
                 <c:pt idx="6">
-                  <c:v>0.672</c:v>
+                  <c:v>0.67200000000000004</c:v>
                 </c:pt>
                 <c:pt idx="7">
-                  <c:v>0.677</c:v>
+                  <c:v>0.67700000000000005</c:v>
                 </c:pt>
                 <c:pt idx="8">
-                  <c:v>0.682</c:v>
+                  <c:v>0.68200000000000005</c:v>
                 </c:pt>
                 <c:pt idx="9">
-                  <c:v>0.695</c:v>
+                  <c:v>0.69499999999999995</c:v>
                 </c:pt>
                 <c:pt idx="10">
                   <c:v>0.7</c:v>
                 </c:pt>
                 <c:pt idx="11">
-                  <c:v>0.707</c:v>
+                  <c:v>0.70699999999999996</c:v>
                 </c:pt>
                 <c:pt idx="12">
-                  <c:v>0.733</c:v>
+                  <c:v>0.73299999999999998</c:v>
                 </c:pt>
               </c:numCache>
             </c:numRef>
           </c:val>
+          <c:extLst>
+            <c:ext xmlns:c16="http://schemas.microsoft.com/office/drawing/2014/chart" uri="{C3380CC4-5D6E-409C-BE32-E72D297353CC}">
+              <c16:uniqueId val="{0000001A-B9D6-45D4-B06B-BA28D3195DAC}"/>
+            </c:ext>
+          </c:extLst>
         </c:ser>
         <c:dLbls>
-          <c:numFmt formatCode="0.0%" sourceLinked="0"/>
-          <c:txPr>
-            <a:bodyPr/>
-            <a:lstStyle/>
-            <a:p>
-              <a:pPr>
-                <a:defRPr sz="1000">
-                  <a:solidFill>
-                    <a:srgbClr val="1F2937"/>
-                  </a:solidFill>
-                  <a:latin typeface="Calibri"/>
-                </a:defRPr>
-              </a:pPr>
-            </a:p>
-          </c:txPr>
           <c:dLblPos val="outEnd"/>
           <c:showLegendKey val="0"/>
           <c:showVal val="1"/>
@@ -360,8 +501,8 @@
           <c:showSerName val="0"/>
           <c:showPercent val="0"/>
           <c:showBubbleSize val="0"/>
-          <c:showLeaderLines val="1"/>
         </c:dLbls>
+        <c:gapWidth val="150"/>
         <c:axId val="-2068027336"/>
         <c:axId val="-2113994440"/>
       </c:barChart>
@@ -372,6 +513,7 @@
         </c:scaling>
         <c:delete val="0"/>
         <c:axPos val="l"/>
+        <c:numFmt formatCode="General" sourceLinked="0"/>
         <c:majorTickMark val="out"/>
         <c:minorTickMark val="none"/>
         <c:tickLblPos val="nextTo"/>
@@ -387,6 +529,7 @@
                 <a:latin typeface="Calibri"/>
               </a:defRPr>
             </a:pPr>
+            <a:endParaRPr lang="en-US"/>
           </a:p>
         </c:txPr>
         <c:crossAx val="-2113994440"/>
@@ -399,11 +542,13 @@
       <c:valAx>
         <c:axId val="-2113994440"/>
         <c:scaling>
+          <c:orientation val="minMax"/>
           <c:max val="0.85"/>
-          <c:min val="0.0"/>
+          <c:min val="0"/>
         </c:scaling>
         <c:delete val="0"/>
         <c:axPos val="b"/>
+        <c:numFmt formatCode="General" sourceLinked="1"/>
         <c:majorTickMark val="out"/>
         <c:minorTickMark val="none"/>
         <c:tickLblPos val="nextTo"/>
@@ -419,13 +564,17 @@
                 <a:latin typeface="Calibri"/>
               </a:defRPr>
             </a:pPr>
+            <a:endParaRPr lang="en-US"/>
           </a:p>
         </c:txPr>
         <c:crossAx val="-2068027336"/>
         <c:crosses val="autoZero"/>
+        <c:crossBetween val="between"/>
       </c:valAx>
     </c:plotArea>
+    <c:plotVisOnly val="1"/>
     <c:dispBlanksAs val="gap"/>
+    <c:showDLblsOverMax val="1"/>
   </c:chart>
   <c:txPr>
     <a:bodyPr/>
@@ -446,14 +595,19 @@
 </file>
 
 <file path=ppt/charts/chart2.xml><?xml version="1.0" encoding="utf-8"?>
-<c:chartSpace xmlns:c="http://schemas.openxmlformats.org/drawingml/2006/chart" xmlns:a="http://schemas.openxmlformats.org/drawingml/2006/main" xmlns:r="http://schemas.openxmlformats.org/officeDocument/2006/relationships">
+<c:chartSpace xmlns:c="http://schemas.openxmlformats.org/drawingml/2006/chart" xmlns:a="http://schemas.openxmlformats.org/drawingml/2006/main" xmlns:r="http://schemas.openxmlformats.org/officeDocument/2006/relationships" xmlns:c16r2="http://schemas.microsoft.com/office/drawing/2015/06/chart">
   <c:date1904 val="0"/>
+  <c:lang val="en-US"/>
+  <c:roundedCorners val="1"/>
+  <c:style val="2"/>
   <c:chart>
     <c:autoTitleDeleted val="1"/>
     <c:plotArea>
+      <c:layout/>
       <c:barChart>
         <c:barDir val="col"/>
         <c:grouping val="clustered"/>
+        <c:varyColors val="1"/>
         <c:ser>
           <c:idx val="0"/>
           <c:order val="0"/>
@@ -468,30 +622,90 @@
               </c:strCache>
             </c:strRef>
           </c:tx>
+          <c:invertIfNegative val="1"/>
           <c:dPt>
             <c:idx val="0"/>
+            <c:invertIfNegative val="1"/>
+            <c:bubble3D val="0"/>
             <c:spPr>
               <a:solidFill>
                 <a:srgbClr val="2563EB"/>
               </a:solidFill>
             </c:spPr>
+            <c:extLst>
+              <c:ext xmlns:c16="http://schemas.microsoft.com/office/drawing/2014/chart" uri="{C3380CC4-5D6E-409C-BE32-E72D297353CC}">
+                <c16:uniqueId val="{00000001-47F1-4D0E-952E-D7BE516B6ABA}"/>
+              </c:ext>
+            </c:extLst>
           </c:dPt>
           <c:dPt>
             <c:idx val="1"/>
+            <c:invertIfNegative val="1"/>
+            <c:bubble3D val="0"/>
             <c:spPr>
               <a:solidFill>
                 <a:srgbClr val="9CA3AF"/>
               </a:solidFill>
             </c:spPr>
+            <c:extLst>
+              <c:ext xmlns:c16="http://schemas.microsoft.com/office/drawing/2014/chart" uri="{C3380CC4-5D6E-409C-BE32-E72D297353CC}">
+                <c16:uniqueId val="{00000003-47F1-4D0E-952E-D7BE516B6ABA}"/>
+              </c:ext>
+            </c:extLst>
           </c:dPt>
           <c:dPt>
             <c:idx val="2"/>
+            <c:invertIfNegative val="1"/>
+            <c:bubble3D val="0"/>
             <c:spPr>
               <a:solidFill>
                 <a:srgbClr val="60A5FA"/>
               </a:solidFill>
             </c:spPr>
+            <c:extLst>
+              <c:ext xmlns:c16="http://schemas.microsoft.com/office/drawing/2014/chart" uri="{C3380CC4-5D6E-409C-BE32-E72D297353CC}">
+                <c16:uniqueId val="{00000005-47F1-4D0E-952E-D7BE516B6ABA}"/>
+              </c:ext>
+            </c:extLst>
           </c:dPt>
+          <c:dLbls>
+            <c:numFmt formatCode="0.0%" sourceLinked="0"/>
+            <c:spPr>
+              <a:noFill/>
+              <a:ln>
+                <a:noFill/>
+              </a:ln>
+              <a:effectLst/>
+            </c:spPr>
+            <c:txPr>
+              <a:bodyPr/>
+              <a:lstStyle/>
+              <a:p>
+                <a:pPr>
+                  <a:defRPr sz="1000">
+                    <a:solidFill>
+                      <a:srgbClr val="1F2937"/>
+                    </a:solidFill>
+                    <a:latin typeface="Calibri"/>
+                  </a:defRPr>
+                </a:pPr>
+                <a:endParaRPr lang="en-US"/>
+              </a:p>
+            </c:txPr>
+            <c:dLblPos val="outEnd"/>
+            <c:showLegendKey val="0"/>
+            <c:showVal val="1"/>
+            <c:showCatName val="0"/>
+            <c:showSerName val="0"/>
+            <c:showPercent val="0"/>
+            <c:showBubbleSize val="0"/>
+            <c:showLeaderLines val="0"/>
+            <c:extLst>
+              <c:ext xmlns:c15="http://schemas.microsoft.com/office/drawing/2012/chart" uri="{CE6537A1-D6FC-4f65-9D91-7224C49458BB}">
+                <c15:showLeaderLines val="0"/>
+              </c:ext>
+            </c:extLst>
+          </c:dLbls>
           <c:cat>
             <c:strRef>
               <c:f>Sheet1!$A$2:$A$4</c:f>
@@ -516,34 +730,24 @@
                 <c:formatCode>General</c:formatCode>
                 <c:ptCount val="3"/>
                 <c:pt idx="0">
-                  <c:v>0.733</c:v>
+                  <c:v>0.73299999999999998</c:v>
                 </c:pt>
                 <c:pt idx="1">
-                  <c:v>0.419</c:v>
+                  <c:v>0.41899999999999998</c:v>
                 </c:pt>
                 <c:pt idx="2">
-                  <c:v>0.707</c:v>
+                  <c:v>0.70699999999999996</c:v>
                 </c:pt>
               </c:numCache>
             </c:numRef>
           </c:val>
+          <c:extLst>
+            <c:ext xmlns:c16="http://schemas.microsoft.com/office/drawing/2014/chart" uri="{C3380CC4-5D6E-409C-BE32-E72D297353CC}">
+              <c16:uniqueId val="{00000006-47F1-4D0E-952E-D7BE516B6ABA}"/>
+            </c:ext>
+          </c:extLst>
         </c:ser>
         <c:dLbls>
-          <c:numFmt formatCode="0.0%" sourceLinked="0"/>
-          <c:txPr>
-            <a:bodyPr/>
-            <a:lstStyle/>
-            <a:p>
-              <a:pPr>
-                <a:defRPr sz="1000">
-                  <a:solidFill>
-                    <a:srgbClr val="1F2937"/>
-                  </a:solidFill>
-                  <a:latin typeface="Calibri"/>
-                </a:defRPr>
-              </a:pPr>
-            </a:p>
-          </c:txPr>
           <c:dLblPos val="outEnd"/>
           <c:showLegendKey val="0"/>
           <c:showVal val="1"/>
@@ -551,8 +755,8 @@
           <c:showSerName val="0"/>
           <c:showPercent val="0"/>
           <c:showBubbleSize val="0"/>
-          <c:showLeaderLines val="1"/>
         </c:dLbls>
+        <c:gapWidth val="150"/>
         <c:axId val="-2068027336"/>
         <c:axId val="-2113994440"/>
       </c:barChart>
@@ -563,6 +767,7 @@
         </c:scaling>
         <c:delete val="0"/>
         <c:axPos val="b"/>
+        <c:numFmt formatCode="General" sourceLinked="0"/>
         <c:majorTickMark val="out"/>
         <c:minorTickMark val="none"/>
         <c:tickLblPos val="nextTo"/>
@@ -578,6 +783,7 @@
                 <a:latin typeface="Calibri"/>
               </a:defRPr>
             </a:pPr>
+            <a:endParaRPr lang="en-US"/>
           </a:p>
         </c:txPr>
         <c:crossAx val="-2113994440"/>
@@ -590,11 +796,13 @@
       <c:valAx>
         <c:axId val="-2113994440"/>
         <c:scaling>
+          <c:orientation val="minMax"/>
           <c:max val="0.85"/>
-          <c:min val="0.0"/>
+          <c:min val="0"/>
         </c:scaling>
         <c:delete val="0"/>
         <c:axPos val="l"/>
+        <c:numFmt formatCode="General" sourceLinked="1"/>
         <c:majorTickMark val="out"/>
         <c:minorTickMark val="none"/>
         <c:tickLblPos val="nextTo"/>
@@ -610,13 +818,17 @@
                 <a:latin typeface="Calibri"/>
               </a:defRPr>
             </a:pPr>
+            <a:endParaRPr lang="en-US"/>
           </a:p>
         </c:txPr>
         <c:crossAx val="-2068027336"/>
         <c:crosses val="autoZero"/>
+        <c:crossBetween val="between"/>
       </c:valAx>
     </c:plotArea>
+    <c:plotVisOnly val="1"/>
     <c:dispBlanksAs val="gap"/>
+    <c:showDLblsOverMax val="1"/>
   </c:chart>
   <c:txPr>
     <a:bodyPr/>
@@ -674,10 +886,9 @@
           <a:lstStyle/>
           <a:p>
             <a:r>
-              <a:rPr lang="en-US" smtClean="0"/>
+              <a:rPr lang="en-US"/>
               <a:t>Click to edit Master title style</a:t>
             </a:r>
-            <a:endParaRPr lang="en-US"/>
           </a:p>
         </p:txBody>
       </p:sp>
@@ -793,10 +1004,9 @@
           </a:lstStyle>
           <a:p>
             <a:r>
-              <a:rPr lang="en-US" smtClean="0"/>
+              <a:rPr lang="en-US"/>
               <a:t>Click to edit Master subtitle style</a:t>
             </a:r>
-            <a:endParaRPr lang="en-US"/>
           </a:p>
         </p:txBody>
       </p:sp>
@@ -817,7 +1027,7 @@
           <a:p>
             <a:fld id="{5BCAD085-E8A6-8845-BD4E-CB4CCA059FC4}" type="datetimeFigureOut">
               <a:rPr lang="en-US" smtClean="0"/>
-              <a:t>1/27/13</a:t>
+              <a:t>6/4/2026</a:t>
             </a:fld>
             <a:endParaRPr lang="en-US"/>
           </a:p>
@@ -911,10 +1121,9 @@
           <a:lstStyle/>
           <a:p>
             <a:r>
-              <a:rPr lang="en-US" smtClean="0"/>
+              <a:rPr lang="en-US"/>
               <a:t>Click to edit Master title style</a:t>
             </a:r>
-            <a:endParaRPr lang="en-US"/>
           </a:p>
         </p:txBody>
       </p:sp>
@@ -935,38 +1144,37 @@
           <a:p>
             <a:pPr lvl="0"/>
             <a:r>
-              <a:rPr lang="en-US" smtClean="0"/>
+              <a:rPr lang="en-US"/>
               <a:t>Click to edit Master text styles</a:t>
             </a:r>
           </a:p>
           <a:p>
             <a:pPr lvl="1"/>
             <a:r>
-              <a:rPr lang="en-US" smtClean="0"/>
+              <a:rPr lang="en-US"/>
               <a:t>Second level</a:t>
             </a:r>
           </a:p>
           <a:p>
             <a:pPr lvl="2"/>
             <a:r>
-              <a:rPr lang="en-US" smtClean="0"/>
+              <a:rPr lang="en-US"/>
               <a:t>Third level</a:t>
             </a:r>
           </a:p>
           <a:p>
             <a:pPr lvl="3"/>
             <a:r>
-              <a:rPr lang="en-US" smtClean="0"/>
+              <a:rPr lang="en-US"/>
               <a:t>Fourth level</a:t>
             </a:r>
           </a:p>
           <a:p>
             <a:pPr lvl="4"/>
             <a:r>
-              <a:rPr lang="en-US" smtClean="0"/>
+              <a:rPr lang="en-US"/>
               <a:t>Fifth level</a:t>
             </a:r>
-            <a:endParaRPr lang="en-US"/>
           </a:p>
         </p:txBody>
       </p:sp>
@@ -987,7 +1195,7 @@
           <a:p>
             <a:fld id="{5BCAD085-E8A6-8845-BD4E-CB4CCA059FC4}" type="datetimeFigureOut">
               <a:rPr lang="en-US" smtClean="0"/>
-              <a:t>1/27/13</a:t>
+              <a:t>6/4/2026</a:t>
             </a:fld>
             <a:endParaRPr lang="en-US"/>
           </a:p>
@@ -1086,10 +1294,9 @@
           <a:lstStyle/>
           <a:p>
             <a:r>
-              <a:rPr lang="en-US" smtClean="0"/>
+              <a:rPr lang="en-US"/>
               <a:t>Click to edit Master title style</a:t>
             </a:r>
-            <a:endParaRPr lang="en-US"/>
           </a:p>
         </p:txBody>
       </p:sp>
@@ -1115,38 +1322,37 @@
           <a:p>
             <a:pPr lvl="0"/>
             <a:r>
-              <a:rPr lang="en-US" smtClean="0"/>
+              <a:rPr lang="en-US"/>
               <a:t>Click to edit Master text styles</a:t>
             </a:r>
           </a:p>
           <a:p>
             <a:pPr lvl="1"/>
             <a:r>
-              <a:rPr lang="en-US" smtClean="0"/>
+              <a:rPr lang="en-US"/>
               <a:t>Second level</a:t>
             </a:r>
           </a:p>
           <a:p>
             <a:pPr lvl="2"/>
             <a:r>
-              <a:rPr lang="en-US" smtClean="0"/>
+              <a:rPr lang="en-US"/>
               <a:t>Third level</a:t>
             </a:r>
           </a:p>
           <a:p>
             <a:pPr lvl="3"/>
             <a:r>
-              <a:rPr lang="en-US" smtClean="0"/>
+              <a:rPr lang="en-US"/>
               <a:t>Fourth level</a:t>
             </a:r>
           </a:p>
           <a:p>
             <a:pPr lvl="4"/>
             <a:r>
-              <a:rPr lang="en-US" smtClean="0"/>
+              <a:rPr lang="en-US"/>
               <a:t>Fifth level</a:t>
             </a:r>
-            <a:endParaRPr lang="en-US"/>
           </a:p>
         </p:txBody>
       </p:sp>
@@ -1167,7 +1373,7 @@
           <a:p>
             <a:fld id="{5BCAD085-E8A6-8845-BD4E-CB4CCA059FC4}" type="datetimeFigureOut">
               <a:rPr lang="en-US" smtClean="0"/>
-              <a:t>1/27/13</a:t>
+              <a:t>6/4/2026</a:t>
             </a:fld>
             <a:endParaRPr lang="en-US"/>
           </a:p>
@@ -1261,10 +1467,9 @@
           <a:lstStyle/>
           <a:p>
             <a:r>
-              <a:rPr lang="en-US" smtClean="0"/>
+              <a:rPr lang="en-US"/>
               <a:t>Click to edit Master title style</a:t>
             </a:r>
-            <a:endParaRPr lang="en-US"/>
           </a:p>
         </p:txBody>
       </p:sp>
@@ -1285,38 +1490,37 @@
           <a:p>
             <a:pPr lvl="0"/>
             <a:r>
-              <a:rPr lang="en-US" smtClean="0"/>
+              <a:rPr lang="en-US"/>
               <a:t>Click to edit Master text styles</a:t>
             </a:r>
           </a:p>
           <a:p>
             <a:pPr lvl="1"/>
             <a:r>
-              <a:rPr lang="en-US" smtClean="0"/>
+              <a:rPr lang="en-US"/>
               <a:t>Second level</a:t>
             </a:r>
           </a:p>
           <a:p>
             <a:pPr lvl="2"/>
             <a:r>
-              <a:rPr lang="en-US" smtClean="0"/>
+              <a:rPr lang="en-US"/>
               <a:t>Third level</a:t>
             </a:r>
           </a:p>
           <a:p>
             <a:pPr lvl="3"/>
             <a:r>
-              <a:rPr lang="en-US" smtClean="0"/>
+              <a:rPr lang="en-US"/>
               <a:t>Fourth level</a:t>
             </a:r>
           </a:p>
           <a:p>
             <a:pPr lvl="4"/>
             <a:r>
-              <a:rPr lang="en-US" smtClean="0"/>
+              <a:rPr lang="en-US"/>
               <a:t>Fifth level</a:t>
             </a:r>
-            <a:endParaRPr lang="en-US"/>
           </a:p>
         </p:txBody>
       </p:sp>
@@ -1337,7 +1541,7 @@
           <a:p>
             <a:fld id="{5BCAD085-E8A6-8845-BD4E-CB4CCA059FC4}" type="datetimeFigureOut">
               <a:rPr lang="en-US" smtClean="0"/>
-              <a:t>1/27/13</a:t>
+              <a:t>6/4/2026</a:t>
             </a:fld>
             <a:endParaRPr lang="en-US"/>
           </a:p>
@@ -1440,10 +1644,9 @@
           </a:lstStyle>
           <a:p>
             <a:r>
-              <a:rPr lang="en-US" smtClean="0"/>
+              <a:rPr lang="en-US"/>
               <a:t>Click to edit Master title style</a:t>
             </a:r>
-            <a:endParaRPr lang="en-US"/>
           </a:p>
         </p:txBody>
       </p:sp>
@@ -1560,7 +1763,7 @@
           <a:p>
             <a:pPr lvl="0"/>
             <a:r>
-              <a:rPr lang="en-US" smtClean="0"/>
+              <a:rPr lang="en-US"/>
               <a:t>Click to edit Master text styles</a:t>
             </a:r>
           </a:p>
@@ -1583,7 +1786,7 @@
           <a:p>
             <a:fld id="{5BCAD085-E8A6-8845-BD4E-CB4CCA059FC4}" type="datetimeFigureOut">
               <a:rPr lang="en-US" smtClean="0"/>
-              <a:t>1/27/13</a:t>
+              <a:t>6/4/2026</a:t>
             </a:fld>
             <a:endParaRPr lang="en-US"/>
           </a:p>
@@ -1677,10 +1880,9 @@
           <a:lstStyle/>
           <a:p>
             <a:r>
-              <a:rPr lang="en-US" smtClean="0"/>
+              <a:rPr lang="en-US"/>
               <a:t>Click to edit Master title style</a:t>
             </a:r>
-            <a:endParaRPr lang="en-US"/>
           </a:p>
         </p:txBody>
       </p:sp>
@@ -1734,38 +1936,37 @@
           <a:p>
             <a:pPr lvl="0"/>
             <a:r>
-              <a:rPr lang="en-US" smtClean="0"/>
+              <a:rPr lang="en-US"/>
               <a:t>Click to edit Master text styles</a:t>
             </a:r>
           </a:p>
           <a:p>
             <a:pPr lvl="1"/>
             <a:r>
-              <a:rPr lang="en-US" smtClean="0"/>
+              <a:rPr lang="en-US"/>
               <a:t>Second level</a:t>
             </a:r>
           </a:p>
           <a:p>
             <a:pPr lvl="2"/>
             <a:r>
-              <a:rPr lang="en-US" smtClean="0"/>
+              <a:rPr lang="en-US"/>
               <a:t>Third level</a:t>
             </a:r>
           </a:p>
           <a:p>
             <a:pPr lvl="3"/>
             <a:r>
-              <a:rPr lang="en-US" smtClean="0"/>
+              <a:rPr lang="en-US"/>
               <a:t>Fourth level</a:t>
             </a:r>
           </a:p>
           <a:p>
             <a:pPr lvl="4"/>
             <a:r>
-              <a:rPr lang="en-US" smtClean="0"/>
+              <a:rPr lang="en-US"/>
               <a:t>Fifth level</a:t>
             </a:r>
-            <a:endParaRPr lang="en-US"/>
           </a:p>
         </p:txBody>
       </p:sp>
@@ -1819,38 +2020,37 @@
           <a:p>
             <a:pPr lvl="0"/>
             <a:r>
-              <a:rPr lang="en-US" smtClean="0"/>
+              <a:rPr lang="en-US"/>
               <a:t>Click to edit Master text styles</a:t>
             </a:r>
           </a:p>
           <a:p>
             <a:pPr lvl="1"/>
             <a:r>
-              <a:rPr lang="en-US" smtClean="0"/>
+              <a:rPr lang="en-US"/>
               <a:t>Second level</a:t>
             </a:r>
           </a:p>
           <a:p>
             <a:pPr lvl="2"/>
             <a:r>
-              <a:rPr lang="en-US" smtClean="0"/>
+              <a:rPr lang="en-US"/>
               <a:t>Third level</a:t>
             </a:r>
           </a:p>
           <a:p>
             <a:pPr lvl="3"/>
             <a:r>
-              <a:rPr lang="en-US" smtClean="0"/>
+              <a:rPr lang="en-US"/>
               <a:t>Fourth level</a:t>
             </a:r>
           </a:p>
           <a:p>
             <a:pPr lvl="4"/>
             <a:r>
-              <a:rPr lang="en-US" smtClean="0"/>
+              <a:rPr lang="en-US"/>
               <a:t>Fifth level</a:t>
             </a:r>
-            <a:endParaRPr lang="en-US"/>
           </a:p>
         </p:txBody>
       </p:sp>
@@ -1871,7 +2071,7 @@
           <a:p>
             <a:fld id="{5BCAD085-E8A6-8845-BD4E-CB4CCA059FC4}" type="datetimeFigureOut">
               <a:rPr lang="en-US" smtClean="0"/>
-              <a:t>1/27/13</a:t>
+              <a:t>6/4/2026</a:t>
             </a:fld>
             <a:endParaRPr lang="en-US"/>
           </a:p>
@@ -1969,10 +2169,9 @@
           </a:lstStyle>
           <a:p>
             <a:r>
-              <a:rPr lang="en-US" smtClean="0"/>
+              <a:rPr lang="en-US"/>
               <a:t>Click to edit Master title style</a:t>
             </a:r>
-            <a:endParaRPr lang="en-US"/>
           </a:p>
         </p:txBody>
       </p:sp>
@@ -2035,7 +2234,7 @@
           <a:p>
             <a:pPr lvl="0"/>
             <a:r>
-              <a:rPr lang="en-US" smtClean="0"/>
+              <a:rPr lang="en-US"/>
               <a:t>Click to edit Master text styles</a:t>
             </a:r>
           </a:p>
@@ -2091,38 +2290,37 @@
           <a:p>
             <a:pPr lvl="0"/>
             <a:r>
-              <a:rPr lang="en-US" smtClean="0"/>
+              <a:rPr lang="en-US"/>
               <a:t>Click to edit Master text styles</a:t>
             </a:r>
           </a:p>
           <a:p>
             <a:pPr lvl="1"/>
             <a:r>
-              <a:rPr lang="en-US" smtClean="0"/>
+              <a:rPr lang="en-US"/>
               <a:t>Second level</a:t>
             </a:r>
           </a:p>
           <a:p>
             <a:pPr lvl="2"/>
             <a:r>
-              <a:rPr lang="en-US" smtClean="0"/>
+              <a:rPr lang="en-US"/>
               <a:t>Third level</a:t>
             </a:r>
           </a:p>
           <a:p>
             <a:pPr lvl="3"/>
             <a:r>
-              <a:rPr lang="en-US" smtClean="0"/>
+              <a:rPr lang="en-US"/>
               <a:t>Fourth level</a:t>
             </a:r>
           </a:p>
           <a:p>
             <a:pPr lvl="4"/>
             <a:r>
-              <a:rPr lang="en-US" smtClean="0"/>
+              <a:rPr lang="en-US"/>
               <a:t>Fifth level</a:t>
             </a:r>
-            <a:endParaRPr lang="en-US"/>
           </a:p>
         </p:txBody>
       </p:sp>
@@ -2185,7 +2383,7 @@
           <a:p>
             <a:pPr lvl="0"/>
             <a:r>
-              <a:rPr lang="en-US" smtClean="0"/>
+              <a:rPr lang="en-US"/>
               <a:t>Click to edit Master text styles</a:t>
             </a:r>
           </a:p>
@@ -2241,38 +2439,37 @@
           <a:p>
             <a:pPr lvl="0"/>
             <a:r>
-              <a:rPr lang="en-US" smtClean="0"/>
+              <a:rPr lang="en-US"/>
               <a:t>Click to edit Master text styles</a:t>
             </a:r>
           </a:p>
           <a:p>
             <a:pPr lvl="1"/>
             <a:r>
-              <a:rPr lang="en-US" smtClean="0"/>
+              <a:rPr lang="en-US"/>
               <a:t>Second level</a:t>
             </a:r>
           </a:p>
           <a:p>
             <a:pPr lvl="2"/>
             <a:r>
-              <a:rPr lang="en-US" smtClean="0"/>
+              <a:rPr lang="en-US"/>
               <a:t>Third level</a:t>
             </a:r>
           </a:p>
           <a:p>
             <a:pPr lvl="3"/>
             <a:r>
-              <a:rPr lang="en-US" smtClean="0"/>
+              <a:rPr lang="en-US"/>
               <a:t>Fourth level</a:t>
             </a:r>
           </a:p>
           <a:p>
             <a:pPr lvl="4"/>
             <a:r>
-              <a:rPr lang="en-US" smtClean="0"/>
+              <a:rPr lang="en-US"/>
               <a:t>Fifth level</a:t>
             </a:r>
-            <a:endParaRPr lang="en-US"/>
           </a:p>
         </p:txBody>
       </p:sp>
@@ -2293,7 +2490,7 @@
           <a:p>
             <a:fld id="{5BCAD085-E8A6-8845-BD4E-CB4CCA059FC4}" type="datetimeFigureOut">
               <a:rPr lang="en-US" smtClean="0"/>
-              <a:t>1/27/13</a:t>
+              <a:t>6/4/2026</a:t>
             </a:fld>
             <a:endParaRPr lang="en-US"/>
           </a:p>
@@ -2387,10 +2584,9 @@
           <a:lstStyle/>
           <a:p>
             <a:r>
-              <a:rPr lang="en-US" smtClean="0"/>
+              <a:rPr lang="en-US"/>
               <a:t>Click to edit Master title style</a:t>
             </a:r>
-            <a:endParaRPr lang="en-US"/>
           </a:p>
         </p:txBody>
       </p:sp>
@@ -2411,7 +2607,7 @@
           <a:p>
             <a:fld id="{5BCAD085-E8A6-8845-BD4E-CB4CCA059FC4}" type="datetimeFigureOut">
               <a:rPr lang="en-US" smtClean="0"/>
-              <a:t>1/27/13</a:t>
+              <a:t>6/4/2026</a:t>
             </a:fld>
             <a:endParaRPr lang="en-US"/>
           </a:p>
@@ -2506,7 +2702,7 @@
           <a:p>
             <a:fld id="{5BCAD085-E8A6-8845-BD4E-CB4CCA059FC4}" type="datetimeFigureOut">
               <a:rPr lang="en-US" smtClean="0"/>
-              <a:t>1/27/13</a:t>
+              <a:t>6/4/2026</a:t>
             </a:fld>
             <a:endParaRPr lang="en-US"/>
           </a:p>
@@ -2609,10 +2805,9 @@
           </a:lstStyle>
           <a:p>
             <a:r>
-              <a:rPr lang="en-US" smtClean="0"/>
+              <a:rPr lang="en-US"/>
               <a:t>Click to edit Master title style</a:t>
             </a:r>
-            <a:endParaRPr lang="en-US"/>
           </a:p>
         </p:txBody>
       </p:sp>
@@ -2666,38 +2861,37 @@
           <a:p>
             <a:pPr lvl="0"/>
             <a:r>
-              <a:rPr lang="en-US" smtClean="0"/>
+              <a:rPr lang="en-US"/>
               <a:t>Click to edit Master text styles</a:t>
             </a:r>
           </a:p>
           <a:p>
             <a:pPr lvl="1"/>
             <a:r>
-              <a:rPr lang="en-US" smtClean="0"/>
+              <a:rPr lang="en-US"/>
               <a:t>Second level</a:t>
             </a:r>
           </a:p>
           <a:p>
             <a:pPr lvl="2"/>
             <a:r>
-              <a:rPr lang="en-US" smtClean="0"/>
+              <a:rPr lang="en-US"/>
               <a:t>Third level</a:t>
             </a:r>
           </a:p>
           <a:p>
             <a:pPr lvl="3"/>
             <a:r>
-              <a:rPr lang="en-US" smtClean="0"/>
+              <a:rPr lang="en-US"/>
               <a:t>Fourth level</a:t>
             </a:r>
           </a:p>
           <a:p>
             <a:pPr lvl="4"/>
             <a:r>
-              <a:rPr lang="en-US" smtClean="0"/>
+              <a:rPr lang="en-US"/>
               <a:t>Fifth level</a:t>
             </a:r>
-            <a:endParaRPr lang="en-US"/>
           </a:p>
         </p:txBody>
       </p:sp>
@@ -2760,7 +2954,7 @@
           <a:p>
             <a:pPr lvl="0"/>
             <a:r>
-              <a:rPr lang="en-US" smtClean="0"/>
+              <a:rPr lang="en-US"/>
               <a:t>Click to edit Master text styles</a:t>
             </a:r>
           </a:p>
@@ -2783,7 +2977,7 @@
           <a:p>
             <a:fld id="{5BCAD085-E8A6-8845-BD4E-CB4CCA059FC4}" type="datetimeFigureOut">
               <a:rPr lang="en-US" smtClean="0"/>
-              <a:t>1/27/13</a:t>
+              <a:t>6/4/2026</a:t>
             </a:fld>
             <a:endParaRPr lang="en-US"/>
           </a:p>
@@ -2886,10 +3080,9 @@
           </a:lstStyle>
           <a:p>
             <a:r>
-              <a:rPr lang="en-US" smtClean="0"/>
+              <a:rPr lang="en-US"/>
               <a:t>Click to edit Master title style</a:t>
             </a:r>
-            <a:endParaRPr lang="en-US"/>
           </a:p>
         </p:txBody>
       </p:sp>
@@ -3013,7 +3206,7 @@
           <a:p>
             <a:pPr lvl="0"/>
             <a:r>
-              <a:rPr lang="en-US" smtClean="0"/>
+              <a:rPr lang="en-US"/>
               <a:t>Click to edit Master text styles</a:t>
             </a:r>
           </a:p>
@@ -3036,7 +3229,7 @@
           <a:p>
             <a:fld id="{5BCAD085-E8A6-8845-BD4E-CB4CCA059FC4}" type="datetimeFigureOut">
               <a:rPr lang="en-US" smtClean="0"/>
-              <a:t>1/27/13</a:t>
+              <a:t>6/4/2026</a:t>
             </a:fld>
             <a:endParaRPr lang="en-US"/>
           </a:p>
@@ -3145,10 +3338,9 @@
           <a:lstStyle/>
           <a:p>
             <a:r>
-              <a:rPr lang="en-US" smtClean="0"/>
+              <a:rPr lang="en-US"/>
               <a:t>Click to edit Master title style</a:t>
             </a:r>
-            <a:endParaRPr lang="en-US"/>
           </a:p>
         </p:txBody>
       </p:sp>
@@ -3179,38 +3371,37 @@
           <a:p>
             <a:pPr lvl="0"/>
             <a:r>
-              <a:rPr lang="en-US" smtClean="0"/>
+              <a:rPr lang="en-US"/>
               <a:t>Click to edit Master text styles</a:t>
             </a:r>
           </a:p>
           <a:p>
             <a:pPr lvl="1"/>
             <a:r>
-              <a:rPr lang="en-US" smtClean="0"/>
+              <a:rPr lang="en-US"/>
               <a:t>Second level</a:t>
             </a:r>
           </a:p>
           <a:p>
             <a:pPr lvl="2"/>
             <a:r>
-              <a:rPr lang="en-US" smtClean="0"/>
+              <a:rPr lang="en-US"/>
               <a:t>Third level</a:t>
             </a:r>
           </a:p>
           <a:p>
             <a:pPr lvl="3"/>
             <a:r>
-              <a:rPr lang="en-US" smtClean="0"/>
+              <a:rPr lang="en-US"/>
               <a:t>Fourth level</a:t>
             </a:r>
           </a:p>
           <a:p>
             <a:pPr lvl="4"/>
             <a:r>
-              <a:rPr lang="en-US" smtClean="0"/>
+              <a:rPr lang="en-US"/>
               <a:t>Fifth level</a:t>
             </a:r>
-            <a:endParaRPr lang="en-US"/>
           </a:p>
         </p:txBody>
       </p:sp>
@@ -3249,7 +3440,7 @@
           <a:p>
             <a:fld id="{5BCAD085-E8A6-8845-BD4E-CB4CCA059FC4}" type="datetimeFigureOut">
               <a:rPr lang="en-US" smtClean="0"/>
-              <a:t>1/27/13</a:t>
+              <a:t>6/4/2026</a:t>
             </a:fld>
             <a:endParaRPr lang="en-US"/>
           </a:p>
@@ -3608,7 +3799,7 @@
 </file>
 
 <file path=ppt/slides/slide1.xml><?xml version="1.0" encoding="utf-8"?>
-<p:sld xmlns:a="http://schemas.openxmlformats.org/drawingml/2006/main" xmlns:p="http://schemas.openxmlformats.org/presentationml/2006/main" xmlns:r="http://schemas.openxmlformats.org/officeDocument/2006/relationships">
+<p:sld xmlns:a="http://schemas.openxmlformats.org/drawingml/2006/main" xmlns:r="http://schemas.openxmlformats.org/officeDocument/2006/relationships" xmlns:p="http://schemas.openxmlformats.org/presentationml/2006/main">
   <p:cSld>
     <p:spTree>
       <p:nvGrpSpPr>
@@ -3616,7 +3807,14 @@
         <p:cNvGrpSpPr/>
         <p:nvPr/>
       </p:nvGrpSpPr>
-      <p:grpSpPr/>
+      <p:grpSpPr>
+        <a:xfrm>
+          <a:off x="0" y="0"/>
+          <a:ext cx="0" cy="0"/>
+          <a:chOff x="0" y="0"/>
+          <a:chExt cx="0" cy="0"/>
+        </a:xfrm>
+      </p:grpSpPr>
       <p:sp>
         <p:nvSpPr>
           <p:cNvPr id="2" name="Rectangle 1"/>
@@ -3658,6 +3856,7 @@
           <a:lstStyle/>
           <a:p>
             <a:pPr algn="ctr"/>
+            <a:endParaRPr/>
           </a:p>
         </p:txBody>
       </p:sp>
@@ -3752,7 +3951,7 @@
         <p:spPr>
           <a:xfrm>
             <a:off x="914400" y="3703320"/>
-            <a:ext cx="10332720" cy="1828800"/>
+            <a:ext cx="10332720" cy="1492716"/>
           </a:xfrm>
           <a:prstGeom prst="rect">
             <a:avLst/>
@@ -3771,7 +3970,7 @@
               </a:spcAft>
             </a:pPr>
             <a:r>
-              <a:rPr sz="2200" b="1" i="0">
+              <a:rPr sz="2200" b="1" i="0" dirty="0">
                 <a:solidFill>
                   <a:srgbClr val="1F2937"/>
                 </a:solidFill>
@@ -3787,7 +3986,7 @@
               </a:spcAft>
             </a:pPr>
             <a:r>
-              <a:rPr sz="1800" b="0" i="0">
+              <a:rPr sz="1800" b="0" i="0" dirty="0">
                 <a:solidFill>
                   <a:srgbClr val="374151"/>
                 </a:solidFill>
@@ -3803,23 +4002,38 @@
               </a:spcAft>
             </a:pPr>
             <a:r>
-              <a:rPr sz="1800" b="0" i="0">
+              <a:rPr lang="en-US" sz="1800" b="0" i="0" dirty="0">
+                <a:solidFill>
+                  <a:srgbClr val="374151"/>
+                </a:solidFill>
+                <a:latin typeface="Calibri"/>
+              </a:rPr>
+              <a:t>Professor</a:t>
+            </a:r>
+            <a:r>
+              <a:rPr lang="en-US" sz="1800" b="0" i="0" dirty="0">
                 <a:solidFill>
                   <a:srgbClr val="6B7280"/>
                 </a:solidFill>
                 <a:latin typeface="Calibri"/>
               </a:rPr>
-              <a:t>Professor: </a:t>
-            </a:r>
-            <a:r>
-              <a:rPr sz="1800" b="0" i="0">
+              <a:t> </a:t>
+            </a:r>
+            <a:r>
+              <a:rPr lang="en-US" sz="1800" b="0" i="0" dirty="0">
                 <a:solidFill>
                   <a:srgbClr val="374151"/>
                 </a:solidFill>
                 <a:latin typeface="Calibri"/>
               </a:rPr>
-              <a:t>[Professor Name]</a:t>
-            </a:r>
+              <a:t>Emre Besler</a:t>
+            </a:r>
+            <a:endParaRPr sz="1800" b="0" i="0" dirty="0">
+              <a:solidFill>
+                <a:srgbClr val="374151"/>
+              </a:solidFill>
+              <a:latin typeface="Calibri"/>
+            </a:endParaRPr>
           </a:p>
           <a:p>
             <a:pPr algn="ctr">
@@ -3828,13 +4042,31 @@
               </a:spcAft>
             </a:pPr>
             <a:r>
-              <a:rPr sz="1800" b="0" i="0">
+              <a:rPr sz="1800" b="0" i="0" dirty="0">
                 <a:solidFill>
                   <a:srgbClr val="374151"/>
                 </a:solidFill>
                 <a:latin typeface="Calibri"/>
               </a:rPr>
-              <a:t>github.com/jonahrosenberg/stat-362-final-project</a:t>
+              <a:t>github.com/</a:t>
+            </a:r>
+            <a:r>
+              <a:rPr sz="1800" b="0" i="0" dirty="0" err="1">
+                <a:solidFill>
+                  <a:srgbClr val="374151"/>
+                </a:solidFill>
+                <a:latin typeface="Calibri"/>
+              </a:rPr>
+              <a:t>jonahrosenberg</a:t>
+            </a:r>
+            <a:r>
+              <a:rPr sz="1800" b="0" i="0" dirty="0">
+                <a:solidFill>
+                  <a:srgbClr val="374151"/>
+                </a:solidFill>
+                <a:latin typeface="Calibri"/>
+              </a:rPr>
+              <a:t>/stat-362-final-project</a:t>
             </a:r>
           </a:p>
         </p:txBody>
@@ -3848,7 +4080,7 @@
 </file>
 
 <file path=ppt/slides/slide2.xml><?xml version="1.0" encoding="utf-8"?>
-<p:sld xmlns:a="http://schemas.openxmlformats.org/drawingml/2006/main" xmlns:p="http://schemas.openxmlformats.org/presentationml/2006/main" xmlns:r="http://schemas.openxmlformats.org/officeDocument/2006/relationships">
+<p:sld xmlns:a="http://schemas.openxmlformats.org/drawingml/2006/main" xmlns:r="http://schemas.openxmlformats.org/officeDocument/2006/relationships" xmlns:p="http://schemas.openxmlformats.org/presentationml/2006/main">
   <p:cSld>
     <p:spTree>
       <p:nvGrpSpPr>
@@ -3856,7 +4088,14 @@
         <p:cNvGrpSpPr/>
         <p:nvPr/>
       </p:nvGrpSpPr>
-      <p:grpSpPr/>
+      <p:grpSpPr>
+        <a:xfrm>
+          <a:off x="0" y="0"/>
+          <a:ext cx="0" cy="0"/>
+          <a:chOff x="0" y="0"/>
+          <a:chExt cx="0" cy="0"/>
+        </a:xfrm>
+      </p:grpSpPr>
       <p:sp>
         <p:nvSpPr>
           <p:cNvPr id="2" name="Rectangle 1"/>
@@ -3898,6 +4137,7 @@
           <a:lstStyle/>
           <a:p>
             <a:pPr algn="ctr"/>
+            <a:endParaRPr/>
           </a:p>
         </p:txBody>
       </p:sp>
@@ -3955,7 +4195,7 @@
         <p:spPr>
           <a:xfrm>
             <a:off x="777240" y="1737360"/>
-            <a:ext cx="10607040" cy="4389120"/>
+            <a:ext cx="10607040" cy="3441968"/>
           </a:xfrm>
           <a:prstGeom prst="rect">
             <a:avLst/>
@@ -3974,7 +4214,7 @@
               </a:spcAft>
             </a:pPr>
             <a:r>
-              <a:rPr sz="1900" b="1" i="0">
+              <a:rPr sz="1900" b="1" i="0" dirty="0">
                 <a:solidFill>
                   <a:srgbClr val="2563EB"/>
                 </a:solidFill>
@@ -3983,7 +4223,7 @@
               <a:t>•  </a:t>
             </a:r>
             <a:r>
-              <a:rPr sz="1900" b="0" i="0">
+              <a:rPr sz="1900" b="0" i="0" dirty="0">
                 <a:solidFill>
                   <a:srgbClr val="374151"/>
                 </a:solidFill>
@@ -3999,7 +4239,7 @@
               </a:spcAft>
             </a:pPr>
             <a:r>
-              <a:rPr sz="1900" b="1" i="0">
+              <a:rPr sz="1900" b="1" i="0" dirty="0">
                 <a:solidFill>
                   <a:srgbClr val="2563EB"/>
                 </a:solidFill>
@@ -4008,16 +4248,16 @@
               <a:t>•  </a:t>
             </a:r>
             <a:r>
-              <a:rPr sz="1900" b="1" i="0">
+              <a:rPr sz="1900" b="1" i="0" dirty="0">
                 <a:solidFill>
                   <a:srgbClr val="1F2937"/>
                 </a:solidFill>
                 <a:latin typeface="Calibri"/>
               </a:rPr>
-              <a:t>Central question:  </a:t>
-            </a:r>
-            <a:r>
-              <a:rPr sz="1900" b="0" i="0">
+              <a:t>Central question: </a:t>
+            </a:r>
+            <a:r>
+              <a:rPr sz="1900" b="0" i="0" dirty="0">
                 <a:solidFill>
                   <a:srgbClr val="374151"/>
                 </a:solidFill>
@@ -4033,7 +4273,7 @@
               </a:spcAft>
             </a:pPr>
             <a:r>
-              <a:rPr sz="1900" b="1" i="0">
+              <a:rPr sz="1900" b="1" i="0" dirty="0">
                 <a:solidFill>
                   <a:srgbClr val="2563EB"/>
                 </a:solidFill>
@@ -4042,7 +4282,7 @@
               <a:t>•  </a:t>
             </a:r>
             <a:r>
-              <a:rPr sz="1900" b="0" i="0">
+              <a:rPr sz="1900" b="0" i="0" dirty="0">
                 <a:solidFill>
                   <a:srgbClr val="374151"/>
                 </a:solidFill>
@@ -4058,7 +4298,7 @@
               </a:spcAft>
             </a:pPr>
             <a:r>
-              <a:rPr sz="1900" b="1" i="0">
+              <a:rPr sz="1900" b="1" i="0" dirty="0">
                 <a:solidFill>
                   <a:srgbClr val="2563EB"/>
                 </a:solidFill>
@@ -4067,7 +4307,7 @@
               <a:t>•  </a:t>
             </a:r>
             <a:r>
-              <a:rPr sz="1900" b="0" i="0">
+              <a:rPr sz="1900" b="0" i="0" dirty="0">
                 <a:solidFill>
                   <a:srgbClr val="374151"/>
                 </a:solidFill>
@@ -4083,7 +4323,7 @@
               </a:spcAft>
             </a:pPr>
             <a:r>
-              <a:rPr sz="1900" b="1" i="0">
+              <a:rPr sz="1900" b="1" i="0" dirty="0">
                 <a:solidFill>
                   <a:srgbClr val="2563EB"/>
                 </a:solidFill>
@@ -4092,7 +4332,7 @@
               <a:t>•  </a:t>
             </a:r>
             <a:r>
-              <a:rPr sz="1900" b="0" i="0">
+              <a:rPr sz="1900" b="0" i="0" dirty="0">
                 <a:solidFill>
                   <a:srgbClr val="374151"/>
                 </a:solidFill>
@@ -4112,7 +4352,7 @@
 </file>
 
 <file path=ppt/slides/slide3.xml><?xml version="1.0" encoding="utf-8"?>
-<p:sld xmlns:a="http://schemas.openxmlformats.org/drawingml/2006/main" xmlns:p="http://schemas.openxmlformats.org/presentationml/2006/main" xmlns:r="http://schemas.openxmlformats.org/officeDocument/2006/relationships">
+<p:sld xmlns:a="http://schemas.openxmlformats.org/drawingml/2006/main" xmlns:r="http://schemas.openxmlformats.org/officeDocument/2006/relationships" xmlns:p="http://schemas.openxmlformats.org/presentationml/2006/main">
   <p:cSld>
     <p:spTree>
       <p:nvGrpSpPr>
@@ -4120,7 +4360,14 @@
         <p:cNvGrpSpPr/>
         <p:nvPr/>
       </p:nvGrpSpPr>
-      <p:grpSpPr/>
+      <p:grpSpPr>
+        <a:xfrm>
+          <a:off x="0" y="0"/>
+          <a:ext cx="0" cy="0"/>
+          <a:chOff x="0" y="0"/>
+          <a:chExt cx="0" cy="0"/>
+        </a:xfrm>
+      </p:grpSpPr>
       <p:sp>
         <p:nvSpPr>
           <p:cNvPr id="2" name="Rectangle 1"/>
@@ -4162,6 +4409,7 @@
           <a:lstStyle/>
           <a:p>
             <a:pPr algn="ctr"/>
+            <a:endParaRPr/>
           </a:p>
         </p:txBody>
       </p:sp>
@@ -4388,14 +4636,32 @@
                 <a:tableStyleId>{5C22544A-7EE6-4342-B048-85BDC9FD1C3A}</a:tableStyleId>
               </a:tblPr>
               <a:tblGrid>
-                <a:gridCol w="1645920"/>
-                <a:gridCol w="1005840"/>
-                <a:gridCol w="1005840"/>
+                <a:gridCol w="1645920">
+                  <a:extLst>
+                    <a:ext uri="{9D8B030D-6E8A-4147-A177-3AD203B41FA5}">
+                      <a16:colId xmlns:a16="http://schemas.microsoft.com/office/drawing/2014/main" val="20000"/>
+                    </a:ext>
+                  </a:extLst>
+                </a:gridCol>
+                <a:gridCol w="1005840">
+                  <a:extLst>
+                    <a:ext uri="{9D8B030D-6E8A-4147-A177-3AD203B41FA5}">
+                      <a16:colId xmlns:a16="http://schemas.microsoft.com/office/drawing/2014/main" val="20001"/>
+                    </a:ext>
+                  </a:extLst>
+                </a:gridCol>
+                <a:gridCol w="1005840">
+                  <a:extLst>
+                    <a:ext uri="{9D8B030D-6E8A-4147-A177-3AD203B41FA5}">
+                      <a16:colId xmlns:a16="http://schemas.microsoft.com/office/drawing/2014/main" val="20002"/>
+                    </a:ext>
+                  </a:extLst>
+                </a:gridCol>
               </a:tblGrid>
               <a:tr h="475488">
                 <a:tc>
                   <a:txBody>
-                    <a:bodyPr wrap="square"/>
+                    <a:bodyPr/>
                     <a:lstStyle/>
                     <a:p>
                       <a:pPr algn="l"/>
@@ -4418,7 +4684,7 @@
                 </a:tc>
                 <a:tc>
                   <a:txBody>
-                    <a:bodyPr wrap="square"/>
+                    <a:bodyPr/>
                     <a:lstStyle/>
                     <a:p>
                       <a:pPr algn="ctr"/>
@@ -4441,7 +4707,7 @@
                 </a:tc>
                 <a:tc>
                   <a:txBody>
-                    <a:bodyPr wrap="square"/>
+                    <a:bodyPr/>
                     <a:lstStyle/>
                     <a:p>
                       <a:pPr algn="ctr"/>
@@ -4462,11 +4728,16 @@
                     </a:solidFill>
                   </a:tcPr>
                 </a:tc>
+                <a:extLst>
+                  <a:ext uri="{0D108BD9-81ED-4DB2-BD59-A6C34878D82A}">
+                    <a16:rowId xmlns:a16="http://schemas.microsoft.com/office/drawing/2014/main" val="10000"/>
+                  </a:ext>
+                </a:extLst>
               </a:tr>
               <a:tr h="475488">
                 <a:tc>
                   <a:txBody>
-                    <a:bodyPr wrap="square"/>
+                    <a:bodyPr/>
                     <a:lstStyle/>
                     <a:p>
                       <a:pPr algn="l"/>
@@ -4489,7 +4760,7 @@
                 </a:tc>
                 <a:tc>
                   <a:txBody>
-                    <a:bodyPr wrap="square"/>
+                    <a:bodyPr/>
                     <a:lstStyle/>
                     <a:p>
                       <a:pPr algn="ctr"/>
@@ -4512,7 +4783,7 @@
                 </a:tc>
                 <a:tc>
                   <a:txBody>
-                    <a:bodyPr wrap="square"/>
+                    <a:bodyPr/>
                     <a:lstStyle/>
                     <a:p>
                       <a:pPr algn="ctr"/>
@@ -4533,11 +4804,16 @@
                     </a:solidFill>
                   </a:tcPr>
                 </a:tc>
+                <a:extLst>
+                  <a:ext uri="{0D108BD9-81ED-4DB2-BD59-A6C34878D82A}">
+                    <a16:rowId xmlns:a16="http://schemas.microsoft.com/office/drawing/2014/main" val="10001"/>
+                  </a:ext>
+                </a:extLst>
               </a:tr>
               <a:tr h="475488">
                 <a:tc>
                   <a:txBody>
-                    <a:bodyPr wrap="square"/>
+                    <a:bodyPr/>
                     <a:lstStyle/>
                     <a:p>
                       <a:pPr algn="l"/>
@@ -4560,7 +4836,7 @@
                 </a:tc>
                 <a:tc>
                   <a:txBody>
-                    <a:bodyPr wrap="square"/>
+                    <a:bodyPr/>
                     <a:lstStyle/>
                     <a:p>
                       <a:pPr algn="ctr"/>
@@ -4583,7 +4859,7 @@
                 </a:tc>
                 <a:tc>
                   <a:txBody>
-                    <a:bodyPr wrap="square"/>
+                    <a:bodyPr/>
                     <a:lstStyle/>
                     <a:p>
                       <a:pPr algn="ctr"/>
@@ -4604,11 +4880,16 @@
                     </a:solidFill>
                   </a:tcPr>
                 </a:tc>
+                <a:extLst>
+                  <a:ext uri="{0D108BD9-81ED-4DB2-BD59-A6C34878D82A}">
+                    <a16:rowId xmlns:a16="http://schemas.microsoft.com/office/drawing/2014/main" val="10002"/>
+                  </a:ext>
+                </a:extLst>
               </a:tr>
               <a:tr h="475488">
                 <a:tc>
                   <a:txBody>
-                    <a:bodyPr wrap="square"/>
+                    <a:bodyPr/>
                     <a:lstStyle/>
                     <a:p>
                       <a:pPr algn="l"/>
@@ -4631,7 +4912,7 @@
                 </a:tc>
                 <a:tc>
                   <a:txBody>
-                    <a:bodyPr wrap="square"/>
+                    <a:bodyPr/>
                     <a:lstStyle/>
                     <a:p>
                       <a:pPr algn="ctr"/>
@@ -4654,7 +4935,7 @@
                 </a:tc>
                 <a:tc>
                   <a:txBody>
-                    <a:bodyPr wrap="square"/>
+                    <a:bodyPr/>
                     <a:lstStyle/>
                     <a:p>
                       <a:pPr algn="ctr"/>
@@ -4675,11 +4956,16 @@
                     </a:solidFill>
                   </a:tcPr>
                 </a:tc>
+                <a:extLst>
+                  <a:ext uri="{0D108BD9-81ED-4DB2-BD59-A6C34878D82A}">
+                    <a16:rowId xmlns:a16="http://schemas.microsoft.com/office/drawing/2014/main" val="10003"/>
+                  </a:ext>
+                </a:extLst>
               </a:tr>
               <a:tr h="475488">
                 <a:tc>
                   <a:txBody>
-                    <a:bodyPr wrap="square"/>
+                    <a:bodyPr/>
                     <a:lstStyle/>
                     <a:p>
                       <a:pPr algn="l"/>
@@ -4702,7 +4988,7 @@
                 </a:tc>
                 <a:tc>
                   <a:txBody>
-                    <a:bodyPr wrap="square"/>
+                    <a:bodyPr/>
                     <a:lstStyle/>
                     <a:p>
                       <a:pPr algn="ctr"/>
@@ -4725,7 +5011,7 @@
                 </a:tc>
                 <a:tc>
                   <a:txBody>
-                    <a:bodyPr wrap="square"/>
+                    <a:bodyPr/>
                     <a:lstStyle/>
                     <a:p>
                       <a:pPr algn="ctr"/>
@@ -4746,6 +5032,11 @@
                     </a:solidFill>
                   </a:tcPr>
                 </a:tc>
+                <a:extLst>
+                  <a:ext uri="{0D108BD9-81ED-4DB2-BD59-A6C34878D82A}">
+                    <a16:rowId xmlns:a16="http://schemas.microsoft.com/office/drawing/2014/main" val="10004"/>
+                  </a:ext>
+                </a:extLst>
               </a:tr>
             </a:tbl>
           </a:graphicData>
@@ -4794,7 +5085,7 @@
 </file>
 
 <file path=ppt/slides/slide4.xml><?xml version="1.0" encoding="utf-8"?>
-<p:sld xmlns:a="http://schemas.openxmlformats.org/drawingml/2006/main" xmlns:p="http://schemas.openxmlformats.org/presentationml/2006/main" xmlns:r="http://schemas.openxmlformats.org/officeDocument/2006/relationships">
+<p:sld xmlns:a="http://schemas.openxmlformats.org/drawingml/2006/main" xmlns:r="http://schemas.openxmlformats.org/officeDocument/2006/relationships" xmlns:p="http://schemas.openxmlformats.org/presentationml/2006/main">
   <p:cSld>
     <p:spTree>
       <p:nvGrpSpPr>
@@ -4802,7 +5093,14 @@
         <p:cNvGrpSpPr/>
         <p:nvPr/>
       </p:nvGrpSpPr>
-      <p:grpSpPr/>
+      <p:grpSpPr>
+        <a:xfrm>
+          <a:off x="0" y="0"/>
+          <a:ext cx="0" cy="0"/>
+          <a:chOff x="0" y="0"/>
+          <a:chExt cx="0" cy="0"/>
+        </a:xfrm>
+      </p:grpSpPr>
       <p:sp>
         <p:nvSpPr>
           <p:cNvPr id="2" name="Rectangle 1"/>
@@ -4844,6 +5142,7 @@
           <a:lstStyle/>
           <a:p>
             <a:pPr algn="ctr"/>
+            <a:endParaRPr/>
           </a:p>
         </p:txBody>
       </p:sp>
@@ -4945,14 +5244,32 @@
                 <a:tableStyleId>{5C22544A-7EE6-4342-B048-85BDC9FD1C3A}</a:tableStyleId>
               </a:tblPr>
               <a:tblGrid>
-                <a:gridCol w="1920240"/>
-                <a:gridCol w="1554480"/>
-                <a:gridCol w="1645920"/>
+                <a:gridCol w="1920240">
+                  <a:extLst>
+                    <a:ext uri="{9D8B030D-6E8A-4147-A177-3AD203B41FA5}">
+                      <a16:colId xmlns:a16="http://schemas.microsoft.com/office/drawing/2014/main" val="20000"/>
+                    </a:ext>
+                  </a:extLst>
+                </a:gridCol>
+                <a:gridCol w="1554480">
+                  <a:extLst>
+                    <a:ext uri="{9D8B030D-6E8A-4147-A177-3AD203B41FA5}">
+                      <a16:colId xmlns:a16="http://schemas.microsoft.com/office/drawing/2014/main" val="20001"/>
+                    </a:ext>
+                  </a:extLst>
+                </a:gridCol>
+                <a:gridCol w="1645920">
+                  <a:extLst>
+                    <a:ext uri="{9D8B030D-6E8A-4147-A177-3AD203B41FA5}">
+                      <a16:colId xmlns:a16="http://schemas.microsoft.com/office/drawing/2014/main" val="20002"/>
+                    </a:ext>
+                  </a:extLst>
+                </a:gridCol>
               </a:tblGrid>
               <a:tr h="483325">
                 <a:tc>
                   <a:txBody>
-                    <a:bodyPr wrap="square"/>
+                    <a:bodyPr/>
                     <a:lstStyle/>
                     <a:p>
                       <a:pPr algn="l"/>
@@ -4975,7 +5292,7 @@
                 </a:tc>
                 <a:tc>
                   <a:txBody>
-                    <a:bodyPr wrap="square"/>
+                    <a:bodyPr/>
                     <a:lstStyle/>
                     <a:p>
                       <a:pPr algn="ctr"/>
@@ -4998,7 +5315,7 @@
                 </a:tc>
                 <a:tc>
                   <a:txBody>
-                    <a:bodyPr wrap="square"/>
+                    <a:bodyPr/>
                     <a:lstStyle/>
                     <a:p>
                       <a:pPr algn="ctr"/>
@@ -5019,11 +5336,16 @@
                     </a:solidFill>
                   </a:tcPr>
                 </a:tc>
+                <a:extLst>
+                  <a:ext uri="{0D108BD9-81ED-4DB2-BD59-A6C34878D82A}">
+                    <a16:rowId xmlns:a16="http://schemas.microsoft.com/office/drawing/2014/main" val="10000"/>
+                  </a:ext>
+                </a:extLst>
               </a:tr>
               <a:tr h="483325">
                 <a:tc>
                   <a:txBody>
-                    <a:bodyPr wrap="square"/>
+                    <a:bodyPr/>
                     <a:lstStyle/>
                     <a:p>
                       <a:pPr algn="l"/>
@@ -5046,7 +5368,7 @@
                 </a:tc>
                 <a:tc>
                   <a:txBody>
-                    <a:bodyPr wrap="square"/>
+                    <a:bodyPr/>
                     <a:lstStyle/>
                     <a:p>
                       <a:pPr algn="ctr"/>
@@ -5069,7 +5391,7 @@
                 </a:tc>
                 <a:tc>
                   <a:txBody>
-                    <a:bodyPr wrap="square"/>
+                    <a:bodyPr/>
                     <a:lstStyle/>
                     <a:p>
                       <a:pPr algn="ctr"/>
@@ -5090,11 +5412,16 @@
                     </a:solidFill>
                   </a:tcPr>
                 </a:tc>
+                <a:extLst>
+                  <a:ext uri="{0D108BD9-81ED-4DB2-BD59-A6C34878D82A}">
+                    <a16:rowId xmlns:a16="http://schemas.microsoft.com/office/drawing/2014/main" val="10001"/>
+                  </a:ext>
+                </a:extLst>
               </a:tr>
               <a:tr h="483325">
                 <a:tc>
                   <a:txBody>
-                    <a:bodyPr wrap="square"/>
+                    <a:bodyPr/>
                     <a:lstStyle/>
                     <a:p>
                       <a:pPr algn="l"/>
@@ -5117,7 +5444,7 @@
                 </a:tc>
                 <a:tc>
                   <a:txBody>
-                    <a:bodyPr wrap="square"/>
+                    <a:bodyPr/>
                     <a:lstStyle/>
                     <a:p>
                       <a:pPr algn="ctr"/>
@@ -5140,7 +5467,7 @@
                 </a:tc>
                 <a:tc>
                   <a:txBody>
-                    <a:bodyPr wrap="square"/>
+                    <a:bodyPr/>
                     <a:lstStyle/>
                     <a:p>
                       <a:pPr algn="ctr"/>
@@ -5161,11 +5488,16 @@
                     </a:solidFill>
                   </a:tcPr>
                 </a:tc>
+                <a:extLst>
+                  <a:ext uri="{0D108BD9-81ED-4DB2-BD59-A6C34878D82A}">
+                    <a16:rowId xmlns:a16="http://schemas.microsoft.com/office/drawing/2014/main" val="10002"/>
+                  </a:ext>
+                </a:extLst>
               </a:tr>
               <a:tr h="483325">
                 <a:tc>
                   <a:txBody>
-                    <a:bodyPr wrap="square"/>
+                    <a:bodyPr/>
                     <a:lstStyle/>
                     <a:p>
                       <a:pPr algn="l"/>
@@ -5188,7 +5520,7 @@
                 </a:tc>
                 <a:tc>
                   <a:txBody>
-                    <a:bodyPr wrap="square"/>
+                    <a:bodyPr/>
                     <a:lstStyle/>
                     <a:p>
                       <a:pPr algn="ctr"/>
@@ -5211,7 +5543,7 @@
                 </a:tc>
                 <a:tc>
                   <a:txBody>
-                    <a:bodyPr wrap="square"/>
+                    <a:bodyPr/>
                     <a:lstStyle/>
                     <a:p>
                       <a:pPr algn="ctr"/>
@@ -5232,11 +5564,16 @@
                     </a:solidFill>
                   </a:tcPr>
                 </a:tc>
+                <a:extLst>
+                  <a:ext uri="{0D108BD9-81ED-4DB2-BD59-A6C34878D82A}">
+                    <a16:rowId xmlns:a16="http://schemas.microsoft.com/office/drawing/2014/main" val="10003"/>
+                  </a:ext>
+                </a:extLst>
               </a:tr>
               <a:tr h="483325">
                 <a:tc>
                   <a:txBody>
-                    <a:bodyPr wrap="square"/>
+                    <a:bodyPr/>
                     <a:lstStyle/>
                     <a:p>
                       <a:pPr algn="l"/>
@@ -5259,7 +5596,7 @@
                 </a:tc>
                 <a:tc>
                   <a:txBody>
-                    <a:bodyPr wrap="square"/>
+                    <a:bodyPr/>
                     <a:lstStyle/>
                     <a:p>
                       <a:pPr algn="ctr"/>
@@ -5282,7 +5619,7 @@
                 </a:tc>
                 <a:tc>
                   <a:txBody>
-                    <a:bodyPr wrap="square"/>
+                    <a:bodyPr/>
                     <a:lstStyle/>
                     <a:p>
                       <a:pPr algn="ctr"/>
@@ -5303,11 +5640,16 @@
                     </a:solidFill>
                   </a:tcPr>
                 </a:tc>
+                <a:extLst>
+                  <a:ext uri="{0D108BD9-81ED-4DB2-BD59-A6C34878D82A}">
+                    <a16:rowId xmlns:a16="http://schemas.microsoft.com/office/drawing/2014/main" val="10004"/>
+                  </a:ext>
+                </a:extLst>
               </a:tr>
               <a:tr h="483325">
                 <a:tc>
                   <a:txBody>
-                    <a:bodyPr wrap="square"/>
+                    <a:bodyPr/>
                     <a:lstStyle/>
                     <a:p>
                       <a:pPr algn="l"/>
@@ -5330,7 +5672,7 @@
                 </a:tc>
                 <a:tc>
                   <a:txBody>
-                    <a:bodyPr wrap="square"/>
+                    <a:bodyPr/>
                     <a:lstStyle/>
                     <a:p>
                       <a:pPr algn="ctr"/>
@@ -5353,7 +5695,7 @@
                 </a:tc>
                 <a:tc>
                   <a:txBody>
-                    <a:bodyPr wrap="square"/>
+                    <a:bodyPr/>
                     <a:lstStyle/>
                     <a:p>
                       <a:pPr algn="ctr"/>
@@ -5374,11 +5716,16 @@
                     </a:solidFill>
                   </a:tcPr>
                 </a:tc>
+                <a:extLst>
+                  <a:ext uri="{0D108BD9-81ED-4DB2-BD59-A6C34878D82A}">
+                    <a16:rowId xmlns:a16="http://schemas.microsoft.com/office/drawing/2014/main" val="10005"/>
+                  </a:ext>
+                </a:extLst>
               </a:tr>
               <a:tr h="483330">
                 <a:tc>
                   <a:txBody>
-                    <a:bodyPr wrap="square"/>
+                    <a:bodyPr/>
                     <a:lstStyle/>
                     <a:p>
                       <a:pPr algn="l"/>
@@ -5401,7 +5748,7 @@
                 </a:tc>
                 <a:tc>
                   <a:txBody>
-                    <a:bodyPr wrap="square"/>
+                    <a:bodyPr/>
                     <a:lstStyle/>
                     <a:p>
                       <a:pPr algn="ctr"/>
@@ -5424,7 +5771,7 @@
                 </a:tc>
                 <a:tc>
                   <a:txBody>
-                    <a:bodyPr wrap="square"/>
+                    <a:bodyPr/>
                     <a:lstStyle/>
                     <a:p>
                       <a:pPr algn="ctr"/>
@@ -5445,6 +5792,11 @@
                     </a:solidFill>
                   </a:tcPr>
                 </a:tc>
+                <a:extLst>
+                  <a:ext uri="{0D108BD9-81ED-4DB2-BD59-A6C34878D82A}">
+                    <a16:rowId xmlns:a16="http://schemas.microsoft.com/office/drawing/2014/main" val="10006"/>
+                  </a:ext>
+                </a:extLst>
               </a:tr>
             </a:tbl>
           </a:graphicData>
@@ -5503,14 +5855,32 @@
                 <a:tableStyleId>{5C22544A-7EE6-4342-B048-85BDC9FD1C3A}</a:tableStyleId>
               </a:tblPr>
               <a:tblGrid>
-                <a:gridCol w="2011680"/>
-                <a:gridCol w="1554480"/>
-                <a:gridCol w="1463040"/>
+                <a:gridCol w="2011680">
+                  <a:extLst>
+                    <a:ext uri="{9D8B030D-6E8A-4147-A177-3AD203B41FA5}">
+                      <a16:colId xmlns:a16="http://schemas.microsoft.com/office/drawing/2014/main" val="20000"/>
+                    </a:ext>
+                  </a:extLst>
+                </a:gridCol>
+                <a:gridCol w="1554480">
+                  <a:extLst>
+                    <a:ext uri="{9D8B030D-6E8A-4147-A177-3AD203B41FA5}">
+                      <a16:colId xmlns:a16="http://schemas.microsoft.com/office/drawing/2014/main" val="20001"/>
+                    </a:ext>
+                  </a:extLst>
+                </a:gridCol>
+                <a:gridCol w="1463040">
+                  <a:extLst>
+                    <a:ext uri="{9D8B030D-6E8A-4147-A177-3AD203B41FA5}">
+                      <a16:colId xmlns:a16="http://schemas.microsoft.com/office/drawing/2014/main" val="20002"/>
+                    </a:ext>
+                  </a:extLst>
+                </a:gridCol>
               </a:tblGrid>
               <a:tr h="434340">
                 <a:tc>
                   <a:txBody>
-                    <a:bodyPr wrap="square"/>
+                    <a:bodyPr/>
                     <a:lstStyle/>
                     <a:p>
                       <a:pPr algn="l"/>
@@ -5533,7 +5903,7 @@
                 </a:tc>
                 <a:tc>
                   <a:txBody>
-                    <a:bodyPr wrap="square"/>
+                    <a:bodyPr/>
                     <a:lstStyle/>
                     <a:p>
                       <a:pPr algn="ctr"/>
@@ -5556,7 +5926,7 @@
                 </a:tc>
                 <a:tc>
                   <a:txBody>
-                    <a:bodyPr wrap="square"/>
+                    <a:bodyPr/>
                     <a:lstStyle/>
                     <a:p>
                       <a:pPr algn="ctr"/>
@@ -5577,11 +5947,16 @@
                     </a:solidFill>
                   </a:tcPr>
                 </a:tc>
+                <a:extLst>
+                  <a:ext uri="{0D108BD9-81ED-4DB2-BD59-A6C34878D82A}">
+                    <a16:rowId xmlns:a16="http://schemas.microsoft.com/office/drawing/2014/main" val="10000"/>
+                  </a:ext>
+                </a:extLst>
               </a:tr>
               <a:tr h="434340">
                 <a:tc>
                   <a:txBody>
-                    <a:bodyPr wrap="square"/>
+                    <a:bodyPr/>
                     <a:lstStyle/>
                     <a:p>
                       <a:pPr algn="l"/>
@@ -5604,7 +5979,7 @@
                 </a:tc>
                 <a:tc>
                   <a:txBody>
-                    <a:bodyPr wrap="square"/>
+                    <a:bodyPr/>
                     <a:lstStyle/>
                     <a:p>
                       <a:pPr algn="ctr"/>
@@ -5627,7 +6002,7 @@
                 </a:tc>
                 <a:tc>
                   <a:txBody>
-                    <a:bodyPr wrap="square"/>
+                    <a:bodyPr/>
                     <a:lstStyle/>
                     <a:p>
                       <a:pPr algn="ctr"/>
@@ -5648,11 +6023,16 @@
                     </a:solidFill>
                   </a:tcPr>
                 </a:tc>
+                <a:extLst>
+                  <a:ext uri="{0D108BD9-81ED-4DB2-BD59-A6C34878D82A}">
+                    <a16:rowId xmlns:a16="http://schemas.microsoft.com/office/drawing/2014/main" val="10001"/>
+                  </a:ext>
+                </a:extLst>
               </a:tr>
               <a:tr h="434340">
                 <a:tc>
                   <a:txBody>
-                    <a:bodyPr wrap="square"/>
+                    <a:bodyPr/>
                     <a:lstStyle/>
                     <a:p>
                       <a:pPr algn="l"/>
@@ -5675,7 +6055,7 @@
                 </a:tc>
                 <a:tc>
                   <a:txBody>
-                    <a:bodyPr wrap="square"/>
+                    <a:bodyPr/>
                     <a:lstStyle/>
                     <a:p>
                       <a:pPr algn="ctr"/>
@@ -5698,7 +6078,7 @@
                 </a:tc>
                 <a:tc>
                   <a:txBody>
-                    <a:bodyPr wrap="square"/>
+                    <a:bodyPr/>
                     <a:lstStyle/>
                     <a:p>
                       <a:pPr algn="ctr"/>
@@ -5719,11 +6099,16 @@
                     </a:solidFill>
                   </a:tcPr>
                 </a:tc>
+                <a:extLst>
+                  <a:ext uri="{0D108BD9-81ED-4DB2-BD59-A6C34878D82A}">
+                    <a16:rowId xmlns:a16="http://schemas.microsoft.com/office/drawing/2014/main" val="10002"/>
+                  </a:ext>
+                </a:extLst>
               </a:tr>
               <a:tr h="434340">
                 <a:tc>
                   <a:txBody>
-                    <a:bodyPr wrap="square"/>
+                    <a:bodyPr/>
                     <a:lstStyle/>
                     <a:p>
                       <a:pPr algn="l"/>
@@ -5746,7 +6131,7 @@
                 </a:tc>
                 <a:tc>
                   <a:txBody>
-                    <a:bodyPr wrap="square"/>
+                    <a:bodyPr/>
                     <a:lstStyle/>
                     <a:p>
                       <a:pPr algn="ctr"/>
@@ -5769,7 +6154,7 @@
                 </a:tc>
                 <a:tc>
                   <a:txBody>
-                    <a:bodyPr wrap="square"/>
+                    <a:bodyPr/>
                     <a:lstStyle/>
                     <a:p>
                       <a:pPr algn="ctr"/>
@@ -5790,6 +6175,11 @@
                     </a:solidFill>
                   </a:tcPr>
                 </a:tc>
+                <a:extLst>
+                  <a:ext uri="{0D108BD9-81ED-4DB2-BD59-A6C34878D82A}">
+                    <a16:rowId xmlns:a16="http://schemas.microsoft.com/office/drawing/2014/main" val="10003"/>
+                  </a:ext>
+                </a:extLst>
               </a:tr>
             </a:tbl>
           </a:graphicData>
@@ -5902,7 +6292,7 @@
 </file>
 
 <file path=ppt/slides/slide5.xml><?xml version="1.0" encoding="utf-8"?>
-<p:sld xmlns:a="http://schemas.openxmlformats.org/drawingml/2006/main" xmlns:p="http://schemas.openxmlformats.org/presentationml/2006/main" xmlns:r="http://schemas.openxmlformats.org/officeDocument/2006/relationships">
+<p:sld xmlns:a="http://schemas.openxmlformats.org/drawingml/2006/main" xmlns:r="http://schemas.openxmlformats.org/officeDocument/2006/relationships" xmlns:p="http://schemas.openxmlformats.org/presentationml/2006/main">
   <p:cSld>
     <p:spTree>
       <p:nvGrpSpPr>
@@ -5910,7 +6300,14 @@
         <p:cNvGrpSpPr/>
         <p:nvPr/>
       </p:nvGrpSpPr>
-      <p:grpSpPr/>
+      <p:grpSpPr>
+        <a:xfrm>
+          <a:off x="0" y="0"/>
+          <a:ext cx="0" cy="0"/>
+          <a:chOff x="0" y="0"/>
+          <a:chExt cx="0" cy="0"/>
+        </a:xfrm>
+      </p:grpSpPr>
       <p:sp>
         <p:nvSpPr>
           <p:cNvPr id="2" name="Rectangle 1"/>
@@ -5952,6 +6349,7 @@
           <a:lstStyle/>
           <a:p>
             <a:pPr algn="ctr"/>
+            <a:endParaRPr/>
           </a:p>
         </p:txBody>
       </p:sp>
@@ -6019,13 +6417,25 @@
                 <a:tableStyleId>{5C22544A-7EE6-4342-B048-85BDC9FD1C3A}</a:tableStyleId>
               </a:tblPr>
               <a:tblGrid>
-                <a:gridCol w="2011680"/>
-                <a:gridCol w="4023360"/>
+                <a:gridCol w="2011680">
+                  <a:extLst>
+                    <a:ext uri="{9D8B030D-6E8A-4147-A177-3AD203B41FA5}">
+                      <a16:colId xmlns:a16="http://schemas.microsoft.com/office/drawing/2014/main" val="20000"/>
+                    </a:ext>
+                  </a:extLst>
+                </a:gridCol>
+                <a:gridCol w="4023360">
+                  <a:extLst>
+                    <a:ext uri="{9D8B030D-6E8A-4147-A177-3AD203B41FA5}">
+                      <a16:colId xmlns:a16="http://schemas.microsoft.com/office/drawing/2014/main" val="20001"/>
+                    </a:ext>
+                  </a:extLst>
+                </a:gridCol>
               </a:tblGrid>
               <a:tr h="457200">
                 <a:tc>
                   <a:txBody>
-                    <a:bodyPr wrap="square"/>
+                    <a:bodyPr/>
                     <a:lstStyle/>
                     <a:p>
                       <a:pPr algn="l"/>
@@ -6048,7 +6458,7 @@
                 </a:tc>
                 <a:tc>
                   <a:txBody>
-                    <a:bodyPr wrap="square"/>
+                    <a:bodyPr/>
                     <a:lstStyle/>
                     <a:p>
                       <a:pPr algn="ctr"/>
@@ -6069,11 +6479,16 @@
                     </a:solidFill>
                   </a:tcPr>
                 </a:tc>
+                <a:extLst>
+                  <a:ext uri="{0D108BD9-81ED-4DB2-BD59-A6C34878D82A}">
+                    <a16:rowId xmlns:a16="http://schemas.microsoft.com/office/drawing/2014/main" val="10000"/>
+                  </a:ext>
+                </a:extLst>
               </a:tr>
               <a:tr h="457200">
                 <a:tc>
                   <a:txBody>
-                    <a:bodyPr wrap="square"/>
+                    <a:bodyPr/>
                     <a:lstStyle/>
                     <a:p>
                       <a:pPr algn="l"/>
@@ -6096,7 +6511,7 @@
                 </a:tc>
                 <a:tc>
                   <a:txBody>
-                    <a:bodyPr wrap="square"/>
+                    <a:bodyPr/>
                     <a:lstStyle/>
                     <a:p>
                       <a:pPr algn="ctr"/>
@@ -6117,11 +6532,16 @@
                     </a:solidFill>
                   </a:tcPr>
                 </a:tc>
+                <a:extLst>
+                  <a:ext uri="{0D108BD9-81ED-4DB2-BD59-A6C34878D82A}">
+                    <a16:rowId xmlns:a16="http://schemas.microsoft.com/office/drawing/2014/main" val="10001"/>
+                  </a:ext>
+                </a:extLst>
               </a:tr>
               <a:tr h="457200">
                 <a:tc>
                   <a:txBody>
-                    <a:bodyPr wrap="square"/>
+                    <a:bodyPr/>
                     <a:lstStyle/>
                     <a:p>
                       <a:pPr algn="l"/>
@@ -6144,7 +6564,7 @@
                 </a:tc>
                 <a:tc>
                   <a:txBody>
-                    <a:bodyPr wrap="square"/>
+                    <a:bodyPr/>
                     <a:lstStyle/>
                     <a:p>
                       <a:pPr algn="ctr"/>
@@ -6165,11 +6585,16 @@
                     </a:solidFill>
                   </a:tcPr>
                 </a:tc>
+                <a:extLst>
+                  <a:ext uri="{0D108BD9-81ED-4DB2-BD59-A6C34878D82A}">
+                    <a16:rowId xmlns:a16="http://schemas.microsoft.com/office/drawing/2014/main" val="10002"/>
+                  </a:ext>
+                </a:extLst>
               </a:tr>
               <a:tr h="457200">
                 <a:tc>
                   <a:txBody>
-                    <a:bodyPr wrap="square"/>
+                    <a:bodyPr/>
                     <a:lstStyle/>
                     <a:p>
                       <a:pPr algn="l"/>
@@ -6192,7 +6617,7 @@
                 </a:tc>
                 <a:tc>
                   <a:txBody>
-                    <a:bodyPr wrap="square"/>
+                    <a:bodyPr/>
                     <a:lstStyle/>
                     <a:p>
                       <a:pPr algn="ctr"/>
@@ -6213,6 +6638,11 @@
                     </a:solidFill>
                   </a:tcPr>
                 </a:tc>
+                <a:extLst>
+                  <a:ext uri="{0D108BD9-81ED-4DB2-BD59-A6C34878D82A}">
+                    <a16:rowId xmlns:a16="http://schemas.microsoft.com/office/drawing/2014/main" val="10003"/>
+                  </a:ext>
+                </a:extLst>
               </a:tr>
             </a:tbl>
           </a:graphicData>
@@ -6389,7 +6819,7 @@
           </a:fontRef>
         </p:style>
         <p:txBody>
-          <a:bodyPr rtlCol="0" anchor="ctr" wrap="square"/>
+          <a:bodyPr wrap="square" rtlCol="0" anchor="ctr"/>
           <a:lstStyle/>
           <a:p>
             <a:pPr algn="ctr"/>
@@ -6445,7 +6875,7 @@
           </a:fontRef>
         </p:style>
         <p:txBody>
-          <a:bodyPr rtlCol="0" anchor="ctr" wrap="square"/>
+          <a:bodyPr wrap="square" rtlCol="0" anchor="ctr"/>
           <a:lstStyle/>
           <a:p>
             <a:pPr algn="ctr"/>
@@ -6501,7 +6931,7 @@
           </a:fontRef>
         </p:style>
         <p:txBody>
-          <a:bodyPr rtlCol="0" anchor="ctr" wrap="square"/>
+          <a:bodyPr wrap="square" rtlCol="0" anchor="ctr"/>
           <a:lstStyle/>
           <a:p>
             <a:pPr algn="ctr"/>
@@ -6559,6 +6989,7 @@
           <a:lstStyle/>
           <a:p>
             <a:pPr algn="ctr"/>
+            <a:endParaRPr/>
           </a:p>
         </p:txBody>
       </p:sp>
@@ -6601,7 +7032,7 @@
           </a:fontRef>
         </p:style>
         <p:txBody>
-          <a:bodyPr rtlCol="0" anchor="ctr" wrap="square"/>
+          <a:bodyPr wrap="square" rtlCol="0" anchor="ctr"/>
           <a:lstStyle/>
           <a:p>
             <a:pPr algn="ctr"/>
@@ -6658,6 +7089,7 @@
           <a:lstStyle/>
           <a:p>
             <a:pPr algn="ctr"/>
+            <a:endParaRPr/>
           </a:p>
         </p:txBody>
       </p:sp>
@@ -6704,7 +7136,7 @@
 </file>
 
 <file path=ppt/slides/slide6.xml><?xml version="1.0" encoding="utf-8"?>
-<p:sld xmlns:a="http://schemas.openxmlformats.org/drawingml/2006/main" xmlns:p="http://schemas.openxmlformats.org/presentationml/2006/main" xmlns:r="http://schemas.openxmlformats.org/officeDocument/2006/relationships">
+<p:sld xmlns:a="http://schemas.openxmlformats.org/drawingml/2006/main" xmlns:r="http://schemas.openxmlformats.org/officeDocument/2006/relationships" xmlns:p="http://schemas.openxmlformats.org/presentationml/2006/main">
   <p:cSld>
     <p:spTree>
       <p:nvGrpSpPr>
@@ -6712,7 +7144,14 @@
         <p:cNvGrpSpPr/>
         <p:nvPr/>
       </p:nvGrpSpPr>
-      <p:grpSpPr/>
+      <p:grpSpPr>
+        <a:xfrm>
+          <a:off x="0" y="0"/>
+          <a:ext cx="0" cy="0"/>
+          <a:chOff x="0" y="0"/>
+          <a:chExt cx="0" cy="0"/>
+        </a:xfrm>
+      </p:grpSpPr>
       <p:sp>
         <p:nvSpPr>
           <p:cNvPr id="2" name="Rectangle 1"/>
@@ -6754,6 +7193,7 @@
           <a:lstStyle/>
           <a:p>
             <a:pPr algn="ctr"/>
+            <a:endParaRPr/>
           </a:p>
         </p:txBody>
       </p:sp>
@@ -6816,7 +7256,7 @@
         </p:xfrm>
         <a:graphic>
           <a:graphicData uri="http://schemas.openxmlformats.org/drawingml/2006/chart">
-            <c:chart xmlns:c="http://schemas.openxmlformats.org/drawingml/2006/chart" r:id="rId2"/>
+            <c:chart xmlns:c="http://schemas.openxmlformats.org/drawingml/2006/chart" xmlns:r="http://schemas.openxmlformats.org/officeDocument/2006/relationships" r:id="rId2"/>
           </a:graphicData>
         </a:graphic>
       </p:graphicFrame>
@@ -6861,6 +7301,7 @@
           <a:lstStyle/>
           <a:p>
             <a:pPr algn="ctr"/>
+            <a:endParaRPr/>
           </a:p>
         </p:txBody>
       </p:sp>
@@ -6939,6 +7380,7 @@
           <a:lstStyle/>
           <a:p>
             <a:pPr algn="ctr"/>
+            <a:endParaRPr/>
           </a:p>
         </p:txBody>
       </p:sp>
@@ -7017,6 +7459,7 @@
           <a:lstStyle/>
           <a:p>
             <a:pPr algn="ctr"/>
+            <a:endParaRPr/>
           </a:p>
         </p:txBody>
       </p:sp>
@@ -7095,6 +7538,7 @@
           <a:lstStyle/>
           <a:p>
             <a:pPr algn="ctr"/>
+            <a:endParaRPr/>
           </a:p>
         </p:txBody>
       </p:sp>
@@ -7266,7 +7710,7 @@
 </file>
 
 <file path=ppt/slides/slide7.xml><?xml version="1.0" encoding="utf-8"?>
-<p:sld xmlns:a="http://schemas.openxmlformats.org/drawingml/2006/main" xmlns:p="http://schemas.openxmlformats.org/presentationml/2006/main" xmlns:r="http://schemas.openxmlformats.org/officeDocument/2006/relationships">
+<p:sld xmlns:a="http://schemas.openxmlformats.org/drawingml/2006/main" xmlns:r="http://schemas.openxmlformats.org/officeDocument/2006/relationships" xmlns:p="http://schemas.openxmlformats.org/presentationml/2006/main">
   <p:cSld>
     <p:spTree>
       <p:nvGrpSpPr>
@@ -7274,7 +7718,14 @@
         <p:cNvGrpSpPr/>
         <p:nvPr/>
       </p:nvGrpSpPr>
-      <p:grpSpPr/>
+      <p:grpSpPr>
+        <a:xfrm>
+          <a:off x="0" y="0"/>
+          <a:ext cx="0" cy="0"/>
+          <a:chOff x="0" y="0"/>
+          <a:chExt cx="0" cy="0"/>
+        </a:xfrm>
+      </p:grpSpPr>
       <p:sp>
         <p:nvSpPr>
           <p:cNvPr id="2" name="Rectangle 1"/>
@@ -7316,6 +7767,7 @@
           <a:lstStyle/>
           <a:p>
             <a:pPr algn="ctr"/>
+            <a:endParaRPr/>
           </a:p>
         </p:txBody>
       </p:sp>
@@ -7378,7 +7830,7 @@
         </p:xfrm>
         <a:graphic>
           <a:graphicData uri="http://schemas.openxmlformats.org/drawingml/2006/chart">
-            <c:chart xmlns:c="http://schemas.openxmlformats.org/drawingml/2006/chart" r:id="rId2"/>
+            <c:chart xmlns:c="http://schemas.openxmlformats.org/drawingml/2006/chart" xmlns:r="http://schemas.openxmlformats.org/officeDocument/2006/relationships" r:id="rId2"/>
           </a:graphicData>
         </a:graphic>
       </p:graphicFrame>
@@ -7435,15 +7887,39 @@
                 <a:tableStyleId>{5C22544A-7EE6-4342-B048-85BDC9FD1C3A}</a:tableStyleId>
               </a:tblPr>
               <a:tblGrid>
-                <a:gridCol w="1737360"/>
-                <a:gridCol w="1097280"/>
-                <a:gridCol w="1097280"/>
-                <a:gridCol w="1097280"/>
+                <a:gridCol w="1737360">
+                  <a:extLst>
+                    <a:ext uri="{9D8B030D-6E8A-4147-A177-3AD203B41FA5}">
+                      <a16:colId xmlns:a16="http://schemas.microsoft.com/office/drawing/2014/main" val="20000"/>
+                    </a:ext>
+                  </a:extLst>
+                </a:gridCol>
+                <a:gridCol w="1097280">
+                  <a:extLst>
+                    <a:ext uri="{9D8B030D-6E8A-4147-A177-3AD203B41FA5}">
+                      <a16:colId xmlns:a16="http://schemas.microsoft.com/office/drawing/2014/main" val="20001"/>
+                    </a:ext>
+                  </a:extLst>
+                </a:gridCol>
+                <a:gridCol w="1097280">
+                  <a:extLst>
+                    <a:ext uri="{9D8B030D-6E8A-4147-A177-3AD203B41FA5}">
+                      <a16:colId xmlns:a16="http://schemas.microsoft.com/office/drawing/2014/main" val="20002"/>
+                    </a:ext>
+                  </a:extLst>
+                </a:gridCol>
+                <a:gridCol w="1097280">
+                  <a:extLst>
+                    <a:ext uri="{9D8B030D-6E8A-4147-A177-3AD203B41FA5}">
+                      <a16:colId xmlns:a16="http://schemas.microsoft.com/office/drawing/2014/main" val="20003"/>
+                    </a:ext>
+                  </a:extLst>
+                </a:gridCol>
               </a:tblGrid>
               <a:tr h="434340">
                 <a:tc>
                   <a:txBody>
-                    <a:bodyPr wrap="square"/>
+                    <a:bodyPr/>
                     <a:lstStyle/>
                     <a:p>
                       <a:pPr algn="l"/>
@@ -7466,7 +7942,7 @@
                 </a:tc>
                 <a:tc>
                   <a:txBody>
-                    <a:bodyPr wrap="square"/>
+                    <a:bodyPr/>
                     <a:lstStyle/>
                     <a:p>
                       <a:pPr algn="ctr"/>
@@ -7489,7 +7965,7 @@
                 </a:tc>
                 <a:tc>
                   <a:txBody>
-                    <a:bodyPr wrap="square"/>
+                    <a:bodyPr/>
                     <a:lstStyle/>
                     <a:p>
                       <a:pPr algn="ctr"/>
@@ -7512,7 +7988,7 @@
                 </a:tc>
                 <a:tc>
                   <a:txBody>
-                    <a:bodyPr wrap="square"/>
+                    <a:bodyPr/>
                     <a:lstStyle/>
                     <a:p>
                       <a:pPr algn="ctr"/>
@@ -7533,11 +8009,16 @@
                     </a:solidFill>
                   </a:tcPr>
                 </a:tc>
+                <a:extLst>
+                  <a:ext uri="{0D108BD9-81ED-4DB2-BD59-A6C34878D82A}">
+                    <a16:rowId xmlns:a16="http://schemas.microsoft.com/office/drawing/2014/main" val="10000"/>
+                  </a:ext>
+                </a:extLst>
               </a:tr>
               <a:tr h="434340">
                 <a:tc>
                   <a:txBody>
-                    <a:bodyPr wrap="square"/>
+                    <a:bodyPr/>
                     <a:lstStyle/>
                     <a:p>
                       <a:pPr algn="l"/>
@@ -7560,7 +8041,7 @@
                 </a:tc>
                 <a:tc>
                   <a:txBody>
-                    <a:bodyPr wrap="square"/>
+                    <a:bodyPr/>
                     <a:lstStyle/>
                     <a:p>
                       <a:pPr algn="ctr"/>
@@ -7583,7 +8064,7 @@
                 </a:tc>
                 <a:tc>
                   <a:txBody>
-                    <a:bodyPr wrap="square"/>
+                    <a:bodyPr/>
                     <a:lstStyle/>
                     <a:p>
                       <a:pPr algn="ctr"/>
@@ -7606,7 +8087,7 @@
                 </a:tc>
                 <a:tc>
                   <a:txBody>
-                    <a:bodyPr wrap="square"/>
+                    <a:bodyPr/>
                     <a:lstStyle/>
                     <a:p>
                       <a:pPr algn="ctr"/>
@@ -7627,11 +8108,16 @@
                     </a:solidFill>
                   </a:tcPr>
                 </a:tc>
+                <a:extLst>
+                  <a:ext uri="{0D108BD9-81ED-4DB2-BD59-A6C34878D82A}">
+                    <a16:rowId xmlns:a16="http://schemas.microsoft.com/office/drawing/2014/main" val="10001"/>
+                  </a:ext>
+                </a:extLst>
               </a:tr>
               <a:tr h="434340">
                 <a:tc>
                   <a:txBody>
-                    <a:bodyPr wrap="square"/>
+                    <a:bodyPr/>
                     <a:lstStyle/>
                     <a:p>
                       <a:pPr algn="l"/>
@@ -7654,7 +8140,7 @@
                 </a:tc>
                 <a:tc>
                   <a:txBody>
-                    <a:bodyPr wrap="square"/>
+                    <a:bodyPr/>
                     <a:lstStyle/>
                     <a:p>
                       <a:pPr algn="ctr"/>
@@ -7677,7 +8163,7 @@
                 </a:tc>
                 <a:tc>
                   <a:txBody>
-                    <a:bodyPr wrap="square"/>
+                    <a:bodyPr/>
                     <a:lstStyle/>
                     <a:p>
                       <a:pPr algn="ctr"/>
@@ -7700,7 +8186,7 @@
                 </a:tc>
                 <a:tc>
                   <a:txBody>
-                    <a:bodyPr wrap="square"/>
+                    <a:bodyPr/>
                     <a:lstStyle/>
                     <a:p>
                       <a:pPr algn="ctr"/>
@@ -7721,11 +8207,16 @@
                     </a:solidFill>
                   </a:tcPr>
                 </a:tc>
+                <a:extLst>
+                  <a:ext uri="{0D108BD9-81ED-4DB2-BD59-A6C34878D82A}">
+                    <a16:rowId xmlns:a16="http://schemas.microsoft.com/office/drawing/2014/main" val="10002"/>
+                  </a:ext>
+                </a:extLst>
               </a:tr>
               <a:tr h="434340">
                 <a:tc>
                   <a:txBody>
-                    <a:bodyPr wrap="square"/>
+                    <a:bodyPr/>
                     <a:lstStyle/>
                     <a:p>
                       <a:pPr algn="l"/>
@@ -7748,7 +8239,7 @@
                 </a:tc>
                 <a:tc>
                   <a:txBody>
-                    <a:bodyPr wrap="square"/>
+                    <a:bodyPr/>
                     <a:lstStyle/>
                     <a:p>
                       <a:pPr algn="ctr"/>
@@ -7771,7 +8262,7 @@
                 </a:tc>
                 <a:tc>
                   <a:txBody>
-                    <a:bodyPr wrap="square"/>
+                    <a:bodyPr/>
                     <a:lstStyle/>
                     <a:p>
                       <a:pPr algn="ctr"/>
@@ -7794,7 +8285,7 @@
                 </a:tc>
                 <a:tc>
                   <a:txBody>
-                    <a:bodyPr wrap="square"/>
+                    <a:bodyPr/>
                     <a:lstStyle/>
                     <a:p>
                       <a:pPr algn="ctr"/>
@@ -7815,6 +8306,11 @@
                     </a:solidFill>
                   </a:tcPr>
                 </a:tc>
+                <a:extLst>
+                  <a:ext uri="{0D108BD9-81ED-4DB2-BD59-A6C34878D82A}">
+                    <a16:rowId xmlns:a16="http://schemas.microsoft.com/office/drawing/2014/main" val="10003"/>
+                  </a:ext>
+                </a:extLst>
               </a:tr>
             </a:tbl>
           </a:graphicData>
@@ -7986,7 +8482,7 @@
 </file>
 
 <file path=ppt/slides/slide8.xml><?xml version="1.0" encoding="utf-8"?>
-<p:sld xmlns:a="http://schemas.openxmlformats.org/drawingml/2006/main" xmlns:p="http://schemas.openxmlformats.org/presentationml/2006/main" xmlns:r="http://schemas.openxmlformats.org/officeDocument/2006/relationships">
+<p:sld xmlns:a="http://schemas.openxmlformats.org/drawingml/2006/main" xmlns:r="http://schemas.openxmlformats.org/officeDocument/2006/relationships" xmlns:p="http://schemas.openxmlformats.org/presentationml/2006/main">
   <p:cSld>
     <p:spTree>
       <p:nvGrpSpPr>
@@ -7994,7 +8490,14 @@
         <p:cNvGrpSpPr/>
         <p:nvPr/>
       </p:nvGrpSpPr>
-      <p:grpSpPr/>
+      <p:grpSpPr>
+        <a:xfrm>
+          <a:off x="0" y="0"/>
+          <a:ext cx="0" cy="0"/>
+          <a:chOff x="0" y="0"/>
+          <a:chExt cx="0" cy="0"/>
+        </a:xfrm>
+      </p:grpSpPr>
       <p:sp>
         <p:nvSpPr>
           <p:cNvPr id="2" name="Rectangle 1"/>
@@ -8036,6 +8539,7 @@
           <a:lstStyle/>
           <a:p>
             <a:pPr algn="ctr"/>
+            <a:endParaRPr/>
           </a:p>
         </p:txBody>
       </p:sp>
